--- a/documentation/Dungeon_Explorer_Presentation.pptx
+++ b/documentation/Dungeon_Explorer_Presentation.pptx
@@ -5,7 +5,7 @@
     <p:sldMasterId id="2147483648" r:id="rId1"/>
   </p:sldMasterIdLst>
   <p:notesMasterIdLst>
-    <p:notesMasterId r:id="rId21"/>
+    <p:notesMasterId r:id="rId19"/>
   </p:notesMasterIdLst>
   <p:sldIdLst>
     <p:sldId id="256" r:id="rId2"/>
@@ -20,13 +20,11 @@
     <p:sldId id="265" r:id="rId11"/>
     <p:sldId id="266" r:id="rId12"/>
     <p:sldId id="267" r:id="rId13"/>
-    <p:sldId id="268" r:id="rId14"/>
-    <p:sldId id="269" r:id="rId15"/>
-    <p:sldId id="270" r:id="rId16"/>
-    <p:sldId id="271" r:id="rId17"/>
-    <p:sldId id="274" r:id="rId18"/>
-    <p:sldId id="275" r:id="rId19"/>
-    <p:sldId id="276" r:id="rId20"/>
+    <p:sldId id="269" r:id="rId14"/>
+    <p:sldId id="270" r:id="rId15"/>
+    <p:sldId id="271" r:id="rId16"/>
+    <p:sldId id="275" r:id="rId17"/>
+    <p:sldId id="276" r:id="rId18"/>
   </p:sldIdLst>
   <p:sldSz cx="12192000" cy="6858000"/>
   <p:notesSz cx="6858000" cy="9144000"/>
@@ -698,7 +696,7 @@
           <a:lstStyle/>
           <a:p>
             <a:r>
-              <a:t>Level is a good proxy for skill, but it has a blind spot. A level-5 player who dies on every single attempt looks exactly the same to the fitness function as a level-5 player who clears easily. Association rule mining fixes that.</a:t>
+              <a:t>The monsters use a finite state machine - four states - combined with A*, tuned per type through parameters rather than separate logic. This follows the F.E.A.R. and Pac-Man pattern from our literature review.</a:t>
             </a:r>
           </a:p>
           <a:p>
@@ -706,7 +704,7 @@
           </a:p>
           <a:p>
             <a:r>
-              <a:t>Every completed run is recorded as a transaction - the outcome, a performance band, and the items you picked up. We take the last five and evaluate two candidate rules: high kill count implies a clear, low kill count implies a loss.</a:t>
+              <a:t>Dormant means the monster does not think at all. It performs no distance calculation and moves not at all. That is what makes exploring safe until you walk into something.</a:t>
             </a:r>
           </a:p>
           <a:p>
@@ -714,7 +712,7 @@
           </a:p>
           <a:p>
             <a:r>
-              <a:t>Then we combine the rule confidence with a loss-streak count. Lose two in a row with a low-kill-loss rule and we multiply the monster limit by 1.35, plus five percent for each extra loss. Clear consistently and we multiply by 1.15.</a:t>
+              <a:t>When you get within four tiles it wakes, then it chases using a real A* path, then attacks when in range, then goes back to chasing.</a:t>
             </a:r>
           </a:p>
           <a:p>
@@ -722,15 +720,7 @@
           </a:p>
           <a:p>
             <a:r>
-              <a:t>The table shows it working: a losing streak gets 17 monsters instead of 12, roughly 30% less simultaneous pressure. A winning streak gets 14. Mixed history falls back to the default of 12.</a:t>
-            </a:r>
-          </a:p>
-          <a:p>
-            <a:endParaRPr/>
-          </a:p>
-          <a:p>
-            <a:r>
-              <a:t>I want to be honest about the limitation here - five transactions is a small sample, so these confidences are only indicative. That is exactly why we clamp the result to between 1 and 18 and use conservative thresholds. The system can nudge difficulty, but it can never shock the player.</a:t>
+              <a:t>Three design points I would highlight. Monster one stops chasing the moment the door is open - there is no point hunting a player who has already won. Monster three's leash is enforced inside the movement step, before it commits to a tile, so it can never wander off and strand the key you need. And environmental kills are recorded through exactly the same code path as a projectile kill, so if you lure a monster into lava you still get the experience and the kill is still in your statistics. That turned out to be a genuinely useful tactic.</a:t>
             </a:r>
           </a:p>
         </p:txBody>
@@ -800,7 +790,7 @@
           <a:lstStyle/>
           <a:p>
             <a:r>
-              <a:t>The monsters use a finite state machine - four states - combined with A*, tuned per type through parameters rather than separate logic. This follows the F.E.A.R. and Pac-Man pattern from our literature review.</a:t>
+              <a:t>Briefly on the data side. Everything lives in one JSON file - no server, no database engine.</a:t>
             </a:r>
           </a:p>
           <a:p>
@@ -808,23 +798,7 @@
           </a:p>
           <a:p>
             <a:r>
-              <a:t>Dormant means the monster does not think at all. It performs no distance calculation and moves not at all. That is what makes exploring safe until you walk into something.</a:t>
-            </a:r>
-          </a:p>
-          <a:p>
-            <a:endParaRPr/>
-          </a:p>
-          <a:p>
-            <a:r>
-              <a:t>When you get within four tiles it wakes, then it chases using a real A* path, then attacks when in range, then goes back to chasing.</a:t>
-            </a:r>
-          </a:p>
-          <a:p>
-            <a:endParaRPr/>
-          </a:p>
-          <a:p>
-            <a:r>
-              <a:t>Three design points I would highlight. Monster one stops chasing the moment the door is open - there is no point hunting a player who has already won. Monster three's leash is enforced inside the movement step, before it commits to a tile, so it can never wander off and strand the key you need. And environmental kills are recorded through exactly the same code path as a projectile kill, so if you lure a monster into lava you still get the experience and the kill is still in your statistics. That turned out to be a genuinely useful tactic.</a:t>
+              <a:t>The run rollback is the interesting part. At the start of every level we deep-copy the profile, items and equipped slots into a baseline. If you die, we restore that baseline and then selectively re-apply the things that should survive a failed attempt - your coins, your item usage statistics, and the run counter. So dying costs you the level and the experience, but never your inventory. That is fair and predictable, and it took two attempts to get the baseline copy complete.</a:t>
             </a:r>
           </a:p>
         </p:txBody>
@@ -894,7 +868,7 @@
           <a:lstStyle/>
           <a:p>
             <a:r>
-              <a:t>Briefly on the data side. Everything lives in one JSON file - no server, no database engine.</a:t>
+              <a:t>These are the standard analysis diagrams. The context diagram on the left, the use case diagram on the right.</a:t>
             </a:r>
           </a:p>
           <a:p>
@@ -902,7 +876,15 @@
           </a:p>
           <a:p>
             <a:r>
-              <a:t>The run rollback is the interesting part. At the start of every level we deep-copy the profile, items and equipped slots into a baseline. If you die, we restore that baseline and then selectively re-apply the things that should survive a failed attempt - your coins, your item usage statistics, and the run counter. So dying costs you the level and the experience, but never your inventory. That is fair and predictable, and it took two attempts to get the baseline copy complete.</a:t>
+              <a:t>One note on honesty: the data flow diagrams we originally drew for this project included a Server process, because the earlier Java version of this game was multiplayer. We deliberately removed the networking so we could concentrate on the AI, and in the final build that Server is collapsed into the local session and its JSON store. We redrew the diagrams to match what we actually built.</a:t>
+            </a:r>
+          </a:p>
+          <a:p>
+            <a:endParaRPr/>
+          </a:p>
+          <a:p>
+            <a:r>
+              <a:t>The most important flow in the whole system is the one in the blue box - the game engine feeds the player's recorded level, kill history and item usage back into the map generator. That arrow is the entire feedback loop, drawn as a data flow.</a:t>
             </a:r>
           </a:p>
         </p:txBody>
@@ -972,7 +954,7 @@
           <a:lstStyle/>
           <a:p>
             <a:r>
-              <a:t>These are the standard analysis diagrams. The context diagram on the left, the use case diagram on the right.</a:t>
+              <a:t>To conclude.</a:t>
             </a:r>
           </a:p>
           <a:p>
@@ -980,7 +962,7 @@
           </a:p>
           <a:p>
             <a:r>
-              <a:t>One note on honesty: the data flow diagrams we originally drew for this project included a Server process, because the earlier Java version of this game was multiplayer. We deliberately removed the networking so we could concentrate on the AI, and in the final build that Server is collapsed into the local session and its JSON store. We redrew the diagrams to match what we actually built.</a:t>
+              <a:t>We built a complete, playable game. Every level is new and every level is guaranteed playable - verified at exactly 1.0 reachable ratio across thirty levels. We implemented six AI and data-mining techniques from scratch in the standard library, and the only third-party dependency in the whole project is Pygame, which only draws.</a:t>
             </a:r>
           </a:p>
           <a:p>
@@ -988,7 +970,15 @@
           </a:p>
           <a:p>
             <a:r>
-              <a:t>The most important flow in the whole system is the one in the blue box - the game engine feeds the player's recorded level, kill history and item usage back into the map generator. That arrow is the entire feedback loop, drawn as a data flow.</a:t>
+              <a:t>And the loop is closed: the game records what the player does, mines it for patterns, and feeds it back into generation. That is the idea we are most pleased with.</a:t>
+            </a:r>
+          </a:p>
+          <a:p>
+            <a:endParaRPr/>
+          </a:p>
+          <a:p>
+            <a:r>
+              <a:t>On the right, honestly, is what we did not do. The one I would fix first is deleting the legacy generator - it is dead code carrying tile constants that contradict the live ones, and that is a real maintenance hazard. Widening the history window is the one that would make the adaptive difficulty genuinely reliable rather than indicative.</a:t>
             </a:r>
           </a:p>
         </p:txBody>
@@ -1014,186 +1004,6 @@
 </file>
 
 <file path=ppt/notesSlides/notesSlide17.xml><?xml version="1.0" encoding="utf-8"?>
-<p:notes xmlns:a="http://schemas.openxmlformats.org/drawingml/2006/main" xmlns:r="http://schemas.openxmlformats.org/officeDocument/2006/relationships" xmlns:p="http://schemas.openxmlformats.org/presentationml/2006/main">
-  <p:cSld>
-    <p:spTree>
-      <p:nvGrpSpPr>
-        <p:cNvPr id="1" name=""/>
-        <p:cNvGrpSpPr/>
-        <p:nvPr/>
-      </p:nvGrpSpPr>
-      <p:grpSpPr>
-        <a:xfrm>
-          <a:off x="0" y="0"/>
-          <a:ext cx="0" cy="0"/>
-          <a:chOff x="0" y="0"/>
-          <a:chExt cx="0" cy="0"/>
-        </a:xfrm>
-      </p:grpSpPr>
-      <p:sp>
-        <p:nvSpPr>
-          <p:cNvPr id="2" name="Slide Image Placeholder 1"/>
-          <p:cNvSpPr>
-            <a:spLocks noGrp="1" noRot="1" noChangeAspect="1"/>
-          </p:cNvSpPr>
-          <p:nvPr>
-            <p:ph type="sldImg" idx="2"/>
-          </p:nvPr>
-        </p:nvSpPr>
-        <p:spPr/>
-      </p:sp>
-      <p:sp>
-        <p:nvSpPr>
-          <p:cNvPr id="3" name="Notes Placeholder 2"/>
-          <p:cNvSpPr>
-            <a:spLocks noGrp="1"/>
-          </p:cNvSpPr>
-          <p:nvPr>
-            <p:ph type="body" sz="quarter" idx="3"/>
-          </p:nvPr>
-        </p:nvSpPr>
-        <p:spPr/>
-        <p:txBody>
-          <a:bodyPr/>
-          <a:lstStyle/>
-          <a:p>
-            <a:r>
-              <a:t>Five challenges worth mentioning, because they are the parts a technical audience will probe.</a:t>
-            </a:r>
-          </a:p>
-          <a:p>
-            <a:endParaRPr/>
-          </a:p>
-          <a:p>
-            <a:r>
-              <a:t>The big one is the first. Randomness does not produce good maps. The fix was architectural - stop treating carving as the whole answer and split the responsibility across four stages.</a:t>
-            </a:r>
-          </a:p>
-          <a:p>
-            <a:endParaRPr/>
-          </a:p>
-          <a:p>
-            <a:r>
-              <a:t>The fourth one is the one I would emphasise for anyone doing quantitative work. Our first attempt at personalisation appeared to do nothing, because we compared single generated maps and the random seed dominated the result. Only when we averaged over twenty runs per band did the real twenty-one percent difference appear. Measure distributions, not single samples - that lesson applies well beyond this project.</a:t>
-            </a:r>
-          </a:p>
-        </p:txBody>
-      </p:sp>
-      <p:sp>
-        <p:nvSpPr>
-          <p:cNvPr id="4" name="Slide Number Placeholder 3"/>
-          <p:cNvSpPr>
-            <a:spLocks noGrp="1"/>
-          </p:cNvSpPr>
-          <p:nvPr>
-            <p:ph type="sldNum" sz="quarter" idx="5"/>
-          </p:nvPr>
-        </p:nvSpPr>
-        <p:spPr/>
-      </p:sp>
-    </p:spTree>
-  </p:cSld>
-  <p:clrMapOvr>
-    <a:masterClrMapping/>
-  </p:clrMapOvr>
-</p:notes>
-</file>
-
-<file path=ppt/notesSlides/notesSlide18.xml><?xml version="1.0" encoding="utf-8"?>
-<p:notes xmlns:a="http://schemas.openxmlformats.org/drawingml/2006/main" xmlns:r="http://schemas.openxmlformats.org/officeDocument/2006/relationships" xmlns:p="http://schemas.openxmlformats.org/presentationml/2006/main">
-  <p:cSld>
-    <p:spTree>
-      <p:nvGrpSpPr>
-        <p:cNvPr id="1" name=""/>
-        <p:cNvGrpSpPr/>
-        <p:nvPr/>
-      </p:nvGrpSpPr>
-      <p:grpSpPr>
-        <a:xfrm>
-          <a:off x="0" y="0"/>
-          <a:ext cx="0" cy="0"/>
-          <a:chOff x="0" y="0"/>
-          <a:chExt cx="0" cy="0"/>
-        </a:xfrm>
-      </p:grpSpPr>
-      <p:sp>
-        <p:nvSpPr>
-          <p:cNvPr id="2" name="Slide Image Placeholder 1"/>
-          <p:cNvSpPr>
-            <a:spLocks noGrp="1" noRot="1" noChangeAspect="1"/>
-          </p:cNvSpPr>
-          <p:nvPr>
-            <p:ph type="sldImg" idx="2"/>
-          </p:nvPr>
-        </p:nvSpPr>
-        <p:spPr/>
-      </p:sp>
-      <p:sp>
-        <p:nvSpPr>
-          <p:cNvPr id="3" name="Notes Placeholder 2"/>
-          <p:cNvSpPr>
-            <a:spLocks noGrp="1"/>
-          </p:cNvSpPr>
-          <p:nvPr>
-            <p:ph type="body" sz="quarter" idx="3"/>
-          </p:nvPr>
-        </p:nvSpPr>
-        <p:spPr/>
-        <p:txBody>
-          <a:bodyPr/>
-          <a:lstStyle/>
-          <a:p>
-            <a:r>
-              <a:t>To conclude.</a:t>
-            </a:r>
-          </a:p>
-          <a:p>
-            <a:endParaRPr/>
-          </a:p>
-          <a:p>
-            <a:r>
-              <a:t>We built a complete, playable game. Every level is new and every level is guaranteed playable - verified at exactly 1.0 reachable ratio across thirty levels. We implemented six AI and data-mining techniques from scratch in the standard library, and the only third-party dependency in the whole project is Pygame, which only draws.</a:t>
-            </a:r>
-          </a:p>
-          <a:p>
-            <a:endParaRPr/>
-          </a:p>
-          <a:p>
-            <a:r>
-              <a:t>And the loop is closed: the game records what the player does, mines it for patterns, and feeds it back into generation. That is the idea we are most pleased with.</a:t>
-            </a:r>
-          </a:p>
-          <a:p>
-            <a:endParaRPr/>
-          </a:p>
-          <a:p>
-            <a:r>
-              <a:t>On the right, honestly, is what we did not do. The one I would fix first is deleting the legacy generator - it is dead code carrying tile constants that contradict the live ones, and that is a real maintenance hazard. Widening the history window is the one that would make the adaptive difficulty genuinely reliable rather than indicative.</a:t>
-            </a:r>
-          </a:p>
-        </p:txBody>
-      </p:sp>
-      <p:sp>
-        <p:nvSpPr>
-          <p:cNvPr id="4" name="Slide Number Placeholder 3"/>
-          <p:cNvSpPr>
-            <a:spLocks noGrp="1"/>
-          </p:cNvSpPr>
-          <p:nvPr>
-            <p:ph type="sldNum" sz="quarter" idx="5"/>
-          </p:nvPr>
-        </p:nvSpPr>
-        <p:spPr/>
-      </p:sp>
-    </p:spTree>
-  </p:cSld>
-  <p:clrMapOvr>
-    <a:masterClrMapping/>
-  </p:clrMapOvr>
-</p:notes>
-</file>
-
-<file path=ppt/notesSlides/notesSlide19.xml><?xml version="1.0" encoding="utf-8"?>
 <p:notes xmlns:a="http://schemas.openxmlformats.org/drawingml/2006/main" xmlns:r="http://schemas.openxmlformats.org/officeDocument/2006/relationships" xmlns:p="http://schemas.openxmlformats.org/presentationml/2006/main">
   <p:cSld>
     <p:spTree>
@@ -2306,7 +2116,7 @@
           <a:p>
             <a:fld id="{5BCAD085-E8A6-8845-BD4E-CB4CCA059FC4}" type="datetimeFigureOut">
               <a:rPr lang="en-US" smtClean="0"/>
-              <a:t>10/1/2026</a:t>
+              <a:t>10/9/2026</a:t>
             </a:fld>
             <a:endParaRPr lang="en-US"/>
           </a:p>
@@ -2474,7 +2284,7 @@
           <a:p>
             <a:fld id="{5BCAD085-E8A6-8845-BD4E-CB4CCA059FC4}" type="datetimeFigureOut">
               <a:rPr lang="en-US" smtClean="0"/>
-              <a:t>10/1/2026</a:t>
+              <a:t>10/9/2026</a:t>
             </a:fld>
             <a:endParaRPr lang="en-US"/>
           </a:p>
@@ -2652,7 +2462,7 @@
           <a:p>
             <a:fld id="{5BCAD085-E8A6-8845-BD4E-CB4CCA059FC4}" type="datetimeFigureOut">
               <a:rPr lang="en-US" smtClean="0"/>
-              <a:t>10/1/2026</a:t>
+              <a:t>10/9/2026</a:t>
             </a:fld>
             <a:endParaRPr lang="en-US"/>
           </a:p>
@@ -2820,7 +2630,7 @@
           <a:p>
             <a:fld id="{5BCAD085-E8A6-8845-BD4E-CB4CCA059FC4}" type="datetimeFigureOut">
               <a:rPr lang="en-US" smtClean="0"/>
-              <a:t>10/1/2026</a:t>
+              <a:t>10/9/2026</a:t>
             </a:fld>
             <a:endParaRPr lang="en-US"/>
           </a:p>
@@ -3065,7 +2875,7 @@
           <a:p>
             <a:fld id="{5BCAD085-E8A6-8845-BD4E-CB4CCA059FC4}" type="datetimeFigureOut">
               <a:rPr lang="en-US" smtClean="0"/>
-              <a:t>10/1/2026</a:t>
+              <a:t>10/9/2026</a:t>
             </a:fld>
             <a:endParaRPr lang="en-US"/>
           </a:p>
@@ -3350,7 +3160,7 @@
           <a:p>
             <a:fld id="{5BCAD085-E8A6-8845-BD4E-CB4CCA059FC4}" type="datetimeFigureOut">
               <a:rPr lang="en-US" smtClean="0"/>
-              <a:t>10/1/2026</a:t>
+              <a:t>10/9/2026</a:t>
             </a:fld>
             <a:endParaRPr lang="en-US"/>
           </a:p>
@@ -3769,7 +3579,7 @@
           <a:p>
             <a:fld id="{5BCAD085-E8A6-8845-BD4E-CB4CCA059FC4}" type="datetimeFigureOut">
               <a:rPr lang="en-US" smtClean="0"/>
-              <a:t>10/1/2026</a:t>
+              <a:t>10/9/2026</a:t>
             </a:fld>
             <a:endParaRPr lang="en-US"/>
           </a:p>
@@ -3886,7 +3696,7 @@
           <a:p>
             <a:fld id="{5BCAD085-E8A6-8845-BD4E-CB4CCA059FC4}" type="datetimeFigureOut">
               <a:rPr lang="en-US" smtClean="0"/>
-              <a:t>10/1/2026</a:t>
+              <a:t>10/9/2026</a:t>
             </a:fld>
             <a:endParaRPr lang="en-US"/>
           </a:p>
@@ -3981,7 +3791,7 @@
           <a:p>
             <a:fld id="{5BCAD085-E8A6-8845-BD4E-CB4CCA059FC4}" type="datetimeFigureOut">
               <a:rPr lang="en-US" smtClean="0"/>
-              <a:t>10/1/2026</a:t>
+              <a:t>10/9/2026</a:t>
             </a:fld>
             <a:endParaRPr lang="en-US"/>
           </a:p>
@@ -4256,7 +4066,7 @@
           <a:p>
             <a:fld id="{5BCAD085-E8A6-8845-BD4E-CB4CCA059FC4}" type="datetimeFigureOut">
               <a:rPr lang="en-US" smtClean="0"/>
-              <a:t>10/1/2026</a:t>
+              <a:t>10/9/2026</a:t>
             </a:fld>
             <a:endParaRPr lang="en-US"/>
           </a:p>
@@ -4508,7 +4318,7 @@
           <a:p>
             <a:fld id="{5BCAD085-E8A6-8845-BD4E-CB4CCA059FC4}" type="datetimeFigureOut">
               <a:rPr lang="en-US" smtClean="0"/>
-              <a:t>10/1/2026</a:t>
+              <a:t>10/9/2026</a:t>
             </a:fld>
             <a:endParaRPr lang="en-US"/>
           </a:p>
@@ -4719,7 +4529,7 @@
           <a:p>
             <a:fld id="{5BCAD085-E8A6-8845-BD4E-CB4CCA059FC4}" type="datetimeFigureOut">
               <a:rPr lang="en-US" smtClean="0"/>
-              <a:t>10/1/2026</a:t>
+              <a:t>10/9/2026</a:t>
             </a:fld>
             <a:endParaRPr lang="en-US"/>
           </a:p>
@@ -7132,7 +6942,7 @@
                 </a:solidFill>
                 <a:latin typeface="Segoe UI"/>
               </a:rPr>
-              <a:t>8. Association Rule Mining</a:t>
+              <a:t>Monster AI</a:t>
             </a:r>
           </a:p>
         </p:txBody>
@@ -7166,7 +6976,7 @@
                 </a:solidFill>
                 <a:latin typeface="Segoe UI"/>
               </a:rPr>
-              <a:t>The game learns how you actually play</a:t>
+              <a:t>One state machine, three personalities</a:t>
             </a:r>
           </a:p>
         </p:txBody>
@@ -7201,21 +7011,45 @@
                 </a:solidFill>
                 <a:latin typeface="Segoe UI"/>
               </a:rPr>
-              <a:t>13 / 21</a:t>
-            </a:r>
-          </a:p>
-        </p:txBody>
-      </p:sp>
-      <p:sp>
-        <p:nvSpPr>
-          <p:cNvPr id="6" name="TextBox 5"/>
+              <a:t>14 / 21</a:t>
+            </a:r>
+          </a:p>
+        </p:txBody>
+      </p:sp>
+      <p:pic>
+        <p:nvPicPr>
+          <p:cNvPr id="6" name="Picture 5" descr="fig_5_8_monster_ai_fsm.png"/>
+          <p:cNvPicPr>
+            <a:picLocks noChangeAspect="1"/>
+          </p:cNvPicPr>
+          <p:nvPr/>
+        </p:nvPicPr>
+        <p:blipFill>
+          <a:blip r:embed="rId3"/>
+          <a:stretch>
+            <a:fillRect/>
+          </a:stretch>
+        </p:blipFill>
+        <p:spPr>
+          <a:xfrm>
+            <a:off x="594360" y="1572768"/>
+            <a:ext cx="7315200" cy="3466178"/>
+          </a:xfrm>
+          <a:prstGeom prst="rect">
+            <a:avLst/>
+          </a:prstGeom>
+        </p:spPr>
+      </p:pic>
+      <p:sp>
+        <p:nvSpPr>
+          <p:cNvPr id="7" name="TextBox 6"/>
           <p:cNvSpPr txBox="1"/>
           <p:nvPr/>
         </p:nvSpPr>
         <p:spPr>
           <a:xfrm>
-            <a:off x="777240" y="1627632"/>
-            <a:ext cx="5440680" cy="3657600"/>
+            <a:off x="8183879" y="1691640"/>
+            <a:ext cx="3520440" cy="3931920"/>
           </a:xfrm>
           <a:prstGeom prst="rect">
             <a:avLst/>
@@ -7230,7 +7064,7 @@
           <a:p>
             <a:pPr marL="219456" indent="-219456" algn="l"/>
             <a:r>
-              <a:rPr sz="1200" b="1">
+              <a:rPr sz="1150" b="1">
                 <a:solidFill>
                   <a:srgbClr val="1F4E9C"/>
                 </a:solidFill>
@@ -7238,28 +7072,86 @@
               <a:t>▪   </a:t>
             </a:r>
             <a:r>
-              <a:rPr sz="1300" b="1">
-                <a:solidFill>
-                  <a:srgbClr val="141828"/>
-                </a:solidFill>
-                <a:latin typeface="Segoe UI"/>
-              </a:rPr>
-              <a:t>Each run becomes a transaction:  </a:t>
-            </a:r>
-            <a:r>
-              <a:rPr sz="1300" b="0">
-                <a:solidFill>
-                  <a:srgbClr val="141828"/>
-                </a:solidFill>
-                <a:latin typeface="Segoe UI"/>
-              </a:rPr>
-              <a:t>outcome:clear / outcome:loss, performance:high / performance:low, plus one item per object collected.</a:t>
-            </a:r>
+              <a:rPr sz="1250" b="1">
+                <a:solidFill>
+                  <a:srgbClr val="141828"/>
+                </a:solidFill>
+                <a:latin typeface="Segoe UI"/>
+              </a:rPr>
+              <a:t>DORMANT</a:t>
+            </a:r>
+            <a:r>
+              <a:rPr sz="1250" b="0">
+                <a:solidFill>
+                  <a:srgbClr val="141828"/>
+                </a:solidFill>
+                <a:latin typeface="Segoe UI"/>
+              </a:rPr>
+              <a:t> → </a:t>
+            </a:r>
+            <a:r>
+              <a:rPr sz="1250" b="1">
+                <a:solidFill>
+                  <a:srgbClr val="141828"/>
+                </a:solidFill>
+                <a:latin typeface="Segoe UI"/>
+              </a:rPr>
+              <a:t>WAKE</a:t>
+            </a:r>
+            <a:r>
+              <a:rPr sz="1250" b="0">
+                <a:solidFill>
+                  <a:srgbClr val="141828"/>
+                </a:solidFill>
+                <a:latin typeface="Segoe UI"/>
+              </a:rPr>
+              <a:t> → </a:t>
+            </a:r>
+            <a:r>
+              <a:rPr sz="1250" b="1">
+                <a:solidFill>
+                  <a:srgbClr val="141828"/>
+                </a:solidFill>
+                <a:latin typeface="Segoe UI"/>
+              </a:rPr>
+              <a:t>CHASE</a:t>
+            </a:r>
+            <a:r>
+              <a:rPr sz="1250" b="0">
+                <a:solidFill>
+                  <a:srgbClr val="141828"/>
+                </a:solidFill>
+                <a:latin typeface="Segoe UI"/>
+              </a:rPr>
+              <a:t> → </a:t>
+            </a:r>
+            <a:r>
+              <a:rPr sz="1250" b="1">
+                <a:solidFill>
+                  <a:srgbClr val="141828"/>
+                </a:solidFill>
+                <a:latin typeface="Segoe UI"/>
+              </a:rPr>
+              <a:t>ATTACK</a:t>
+            </a:r>
+          </a:p>
+          <a:p>
+            <a:pPr algn="l">
+              <a:spcAft>
+                <a:spcPts val="700"/>
+              </a:spcAft>
+            </a:pPr>
+            <a:endParaRPr sz="1250" b="1">
+              <a:solidFill>
+                <a:srgbClr val="141828"/>
+              </a:solidFill>
+              <a:latin typeface="Segoe UI"/>
+            </a:endParaRPr>
           </a:p>
           <a:p>
             <a:pPr marL="219456" indent="-219456" algn="l"/>
             <a:r>
-              <a:rPr sz="1200" b="1">
+              <a:rPr sz="1150" b="1">
                 <a:solidFill>
                   <a:srgbClr val="1F4E9C"/>
                 </a:solidFill>
@@ -7267,19 +7159,32 @@
               <a:t>▪   </a:t>
             </a:r>
             <a:r>
-              <a:rPr sz="1300" b="1">
-                <a:solidFill>
-                  <a:srgbClr val="141828"/>
-                </a:solidFill>
-                <a:latin typeface="Segoe UI"/>
-              </a:rPr>
-              <a:t>Two rules, mined over the last five runs</a:t>
-            </a:r>
+              <a:rPr sz="1250" b="0">
+                <a:solidFill>
+                  <a:srgbClr val="141828"/>
+                </a:solidFill>
+                <a:latin typeface="Segoe UI"/>
+              </a:rPr>
+              <a:t>A monster does not think at all while dormant — that is what makes exploration safe until you get close.</a:t>
+            </a:r>
+          </a:p>
+          <a:p>
+            <a:pPr algn="l">
+              <a:spcAft>
+                <a:spcPts val="700"/>
+              </a:spcAft>
+            </a:pPr>
+            <a:endParaRPr sz="1250" b="0">
+              <a:solidFill>
+                <a:srgbClr val="141828"/>
+              </a:solidFill>
+              <a:latin typeface="Segoe UI"/>
+            </a:endParaRPr>
           </a:p>
           <a:p>
             <a:pPr marL="219456" indent="-219456" algn="l"/>
             <a:r>
-              <a:rPr sz="1200" b="1">
+              <a:rPr sz="1150" b="1">
                 <a:solidFill>
                   <a:srgbClr val="1F4E9C"/>
                 </a:solidFill>
@@ -7287,28 +7192,41 @@
               <a:t>▪   </a:t>
             </a:r>
             <a:r>
-              <a:rPr sz="1300" b="1">
-                <a:solidFill>
-                  <a:srgbClr val="141828"/>
-                </a:solidFill>
-                <a:latin typeface="Segoe UI"/>
-              </a:rPr>
-              <a:t>performance:high  →  outcome:clear</a:t>
-            </a:r>
-            <a:r>
-              <a:rPr sz="1300" b="0">
-                <a:solidFill>
-                  <a:srgbClr val="141828"/>
-                </a:solidFill>
-                <a:latin typeface="Segoe UI"/>
-              </a:rPr>
-              <a:t>   confidence 1.00 on a winning streak</a:t>
-            </a:r>
+              <a:rPr sz="1250" b="1">
+                <a:solidFill>
+                  <a:srgbClr val="141828"/>
+                </a:solidFill>
+                <a:latin typeface="Segoe UI"/>
+              </a:rPr>
+              <a:t>Chase uses genuine A* paths</a:t>
+            </a:r>
+            <a:r>
+              <a:rPr sz="1250" b="0">
+                <a:solidFill>
+                  <a:srgbClr val="141828"/>
+                </a:solidFill>
+                <a:latin typeface="Segoe UI"/>
+              </a:rPr>
+              <a:t>, on the monster's own movement tick rather than every frame.</a:t>
+            </a:r>
+          </a:p>
+          <a:p>
+            <a:pPr algn="l">
+              <a:spcAft>
+                <a:spcPts val="700"/>
+              </a:spcAft>
+            </a:pPr>
+            <a:endParaRPr sz="1250" b="0">
+              <a:solidFill>
+                <a:srgbClr val="141828"/>
+              </a:solidFill>
+              <a:latin typeface="Segoe UI"/>
+            </a:endParaRPr>
           </a:p>
           <a:p>
             <a:pPr marL="219456" indent="-219456" algn="l"/>
             <a:r>
-              <a:rPr sz="1200" b="1">
+              <a:rPr sz="1150" b="1">
                 <a:solidFill>
                   <a:srgbClr val="1F4E9C"/>
                 </a:solidFill>
@@ -7316,28 +7234,41 @@
               <a:t>▪   </a:t>
             </a:r>
             <a:r>
-              <a:rPr sz="1300" b="1">
-                <a:solidFill>
-                  <a:srgbClr val="141828"/>
-                </a:solidFill>
-                <a:latin typeface="Segoe UI"/>
-              </a:rPr>
-              <a:t>performance:low  →  outcome:loss</a:t>
-            </a:r>
-            <a:r>
-              <a:rPr sz="1300" b="0">
-                <a:solidFill>
-                  <a:srgbClr val="141828"/>
-                </a:solidFill>
-                <a:latin typeface="Segoe UI"/>
-              </a:rPr>
-              <a:t>   confidence 1.00 on a losing streak</a:t>
-            </a:r>
+              <a:rPr sz="1250" b="1">
+                <a:solidFill>
+                  <a:srgbClr val="141828"/>
+                </a:solidFill>
+                <a:latin typeface="Segoe UI"/>
+              </a:rPr>
+              <a:t>monster3's leash is enforced per step</a:t>
+            </a:r>
+            <a:r>
+              <a:rPr sz="1250" b="0">
+                <a:solidFill>
+                  <a:srgbClr val="141828"/>
+                </a:solidFill>
+                <a:latin typeface="Segoe UI"/>
+              </a:rPr>
+              <a:t>, so it can never escape — which also guarantees the Door Key it drops is always reachable.</a:t>
+            </a:r>
+          </a:p>
+          <a:p>
+            <a:pPr algn="l">
+              <a:spcAft>
+                <a:spcPts val="700"/>
+              </a:spcAft>
+            </a:pPr>
+            <a:endParaRPr sz="1250" b="0">
+              <a:solidFill>
+                <a:srgbClr val="141828"/>
+              </a:solidFill>
+              <a:latin typeface="Segoe UI"/>
+            </a:endParaRPr>
           </a:p>
           <a:p>
             <a:pPr marL="219456" indent="-219456" algn="l"/>
             <a:r>
-              <a:rPr sz="1200" b="1">
+              <a:rPr sz="1150" b="1">
                 <a:solidFill>
                   <a:srgbClr val="1F4E9C"/>
                 </a:solidFill>
@@ -7345,1056 +7276,14 @@
               <a:t>▪   </a:t>
             </a:r>
             <a:r>
-              <a:rPr sz="1300" b="1">
-                <a:solidFill>
-                  <a:srgbClr val="141828"/>
-                </a:solidFill>
-                <a:latin typeface="Segoe UI"/>
-              </a:rPr>
-              <a:t>Then the monster count is adjusted</a:t>
-            </a:r>
-          </a:p>
-          <a:p>
-            <a:pPr marL="219456" indent="-219456" algn="l"/>
-            <a:r>
-              <a:rPr sz="1200" b="1">
-                <a:solidFill>
-                  <a:srgbClr val="1F4E9C"/>
-                </a:solidFill>
-              </a:rPr>
-              <a:t>▪   </a:t>
-            </a:r>
-            <a:r>
-              <a:rPr sz="1300" b="1">
-                <a:solidFill>
-                  <a:srgbClr val="141828"/>
-                </a:solidFill>
-                <a:latin typeface="Segoe UI"/>
-              </a:rPr>
-              <a:t>losing streak ≥ 2 and low_kill_loss ≥ 0.5</a:t>
-            </a:r>
-            <a:r>
-              <a:rPr sz="1300" b="0">
-                <a:solidFill>
-                  <a:srgbClr val="141828"/>
-                </a:solidFill>
-                <a:latin typeface="Segoe UI"/>
-              </a:rPr>
-              <a:t>  →  × 1.35  (+0.05 per extra loss, capped × 1.55)</a:t>
-            </a:r>
-          </a:p>
-          <a:p>
-            <a:pPr marL="219456" indent="-219456" algn="l"/>
-            <a:r>
-              <a:rPr sz="1200" b="1">
-                <a:solidFill>
-                  <a:srgbClr val="1F4E9C"/>
-                </a:solidFill>
-              </a:rPr>
-              <a:t>▪   </a:t>
-            </a:r>
-            <a:r>
-              <a:rPr sz="1300" b="1">
-                <a:solidFill>
-                  <a:srgbClr val="141828"/>
-                </a:solidFill>
-                <a:latin typeface="Segoe UI"/>
-              </a:rPr>
-              <a:t>high_kill_clear ≥ 0.5</a:t>
-            </a:r>
-            <a:r>
-              <a:rPr sz="1300" b="0">
-                <a:solidFill>
-                  <a:srgbClr val="141828"/>
-                </a:solidFill>
-                <a:latin typeface="Segoe UI"/>
-              </a:rPr>
-              <a:t>  →  × 1.15</a:t>
-            </a:r>
-          </a:p>
-          <a:p>
-            <a:pPr marL="219456" indent="-219456" algn="l"/>
-            <a:r>
-              <a:rPr sz="1200" b="1">
-                <a:solidFill>
-                  <a:srgbClr val="1F4E9C"/>
-                </a:solidFill>
-              </a:rPr>
-              <a:t>▪   </a:t>
-            </a:r>
-            <a:r>
-              <a:rPr sz="1300" b="1">
-                <a:solidFill>
-                  <a:srgbClr val="141828"/>
-                </a:solidFill>
-                <a:latin typeface="Segoe UI"/>
-              </a:rPr>
-              <a:t>otherwise</a:t>
-            </a:r>
-            <a:r>
-              <a:rPr sz="1300" b="0">
-                <a:solidFill>
-                  <a:srgbClr val="141828"/>
-                </a:solidFill>
-                <a:latin typeface="Segoe UI"/>
-              </a:rPr>
-              <a:t>  →  base limit of 12</a:t>
-            </a:r>
-          </a:p>
-          <a:p>
-            <a:pPr marL="219456" indent="-219456" algn="l"/>
-            <a:r>
-              <a:rPr sz="1200" b="1">
-                <a:solidFill>
-                  <a:srgbClr val="1F4E9C"/>
-                </a:solidFill>
-              </a:rPr>
-              <a:t>▪   </a:t>
-            </a:r>
-            <a:r>
-              <a:rPr sz="1300" b="1">
-                <a:solidFill>
-                  <a:srgbClr val="141828"/>
-                </a:solidFill>
-                <a:latin typeface="Segoe UI"/>
-              </a:rPr>
-              <a:t>Always clamped to 1 – 18</a:t>
-            </a:r>
-            <a:r>
-              <a:rPr sz="1300" b="0">
-                <a:solidFill>
-                  <a:srgbClr val="141828"/>
-                </a:solidFill>
-                <a:latin typeface="Segoe UI"/>
-              </a:rPr>
-              <a:t>, so no history can produce a trivial or impossible level.</a:t>
-            </a:r>
-          </a:p>
-        </p:txBody>
-      </p:sp>
-      <p:sp>
-        <p:nvSpPr>
-          <p:cNvPr id="7" name="Rounded Rectangle 6"/>
-          <p:cNvSpPr/>
-          <p:nvPr/>
-        </p:nvSpPr>
-        <p:spPr>
-          <a:xfrm>
-            <a:off x="6537960" y="1600200"/>
-            <a:ext cx="4892040" cy="365760"/>
-          </a:xfrm>
-          <a:prstGeom prst="roundRect">
-            <a:avLst>
-              <a:gd name="adj" fmla="val 12000"/>
-            </a:avLst>
-          </a:prstGeom>
-          <a:solidFill>
-            <a:srgbClr val="1F4E9C"/>
-          </a:solidFill>
-          <a:ln>
-            <a:noFill/>
-          </a:ln>
-          <a:effectLst/>
-        </p:spPr>
-        <p:style>
-          <a:lnRef idx="1">
-            <a:schemeClr val="accent1"/>
-          </a:lnRef>
-          <a:fillRef idx="3">
-            <a:schemeClr val="accent1"/>
-          </a:fillRef>
-          <a:effectRef idx="2">
-            <a:schemeClr val="accent1"/>
-          </a:effectRef>
-          <a:fontRef idx="minor">
-            <a:schemeClr val="lt1"/>
-          </a:fontRef>
-        </p:style>
-        <p:txBody>
-          <a:bodyPr wrap="square" tIns="36576" bIns="36576" rtlCol="0" anchor="ctr"/>
-          <a:lstStyle/>
-          <a:p>
-            <a:pPr algn="ctr"/>
-            <a:r>
-              <a:rPr sz="1200" b="1">
-                <a:solidFill>
-                  <a:srgbClr val="FFFFFF"/>
-                </a:solidFill>
-                <a:latin typeface="Segoe UI"/>
-              </a:rPr>
-              <a:t>Mined rules → next level's monster count</a:t>
-            </a:r>
-          </a:p>
-        </p:txBody>
-      </p:sp>
-      <p:sp>
-        <p:nvSpPr>
-          <p:cNvPr id="8" name="Rectangle 7"/>
-          <p:cNvSpPr/>
-          <p:nvPr/>
-        </p:nvSpPr>
-        <p:spPr>
-          <a:xfrm>
-            <a:off x="6537960" y="2057400"/>
-            <a:ext cx="1874519" cy="384048"/>
-          </a:xfrm>
-          <a:prstGeom prst="rect">
-            <a:avLst/>
-          </a:prstGeom>
-          <a:solidFill>
-            <a:srgbClr val="1F4E9C"/>
-          </a:solidFill>
-          <a:ln w="9525">
-            <a:solidFill>
-              <a:srgbClr val="C8D0E4"/>
-            </a:solidFill>
-          </a:ln>
-          <a:effectLst/>
-        </p:spPr>
-        <p:style>
-          <a:lnRef idx="1">
-            <a:schemeClr val="accent1"/>
-          </a:lnRef>
-          <a:fillRef idx="3">
-            <a:schemeClr val="accent1"/>
-          </a:fillRef>
-          <a:effectRef idx="2">
-            <a:schemeClr val="accent1"/>
-          </a:effectRef>
-          <a:fontRef idx="minor">
-            <a:schemeClr val="lt1"/>
-          </a:fontRef>
-        </p:style>
-        <p:txBody>
-          <a:bodyPr wrap="square" lIns="54864" tIns="0" rIns="36576" bIns="0" rtlCol="0" anchor="ctr"/>
-          <a:lstStyle/>
-          <a:p>
-            <a:pPr algn="l"/>
-            <a:r>
-              <a:rPr sz="1100" b="1">
-                <a:solidFill>
-                  <a:srgbClr val="FFFFFF"/>
-                </a:solidFill>
-                <a:latin typeface="Segoe UI"/>
-              </a:rPr>
-              <a:t>History</a:t>
-            </a:r>
-          </a:p>
-        </p:txBody>
-      </p:sp>
-      <p:sp>
-        <p:nvSpPr>
-          <p:cNvPr id="9" name="Rectangle 8"/>
-          <p:cNvSpPr/>
-          <p:nvPr/>
-        </p:nvSpPr>
-        <p:spPr>
-          <a:xfrm>
-            <a:off x="8412480" y="2057400"/>
-            <a:ext cx="1874519" cy="384048"/>
-          </a:xfrm>
-          <a:prstGeom prst="rect">
-            <a:avLst/>
-          </a:prstGeom>
-          <a:solidFill>
-            <a:srgbClr val="1F4E9C"/>
-          </a:solidFill>
-          <a:ln w="9525">
-            <a:solidFill>
-              <a:srgbClr val="C8D0E4"/>
-            </a:solidFill>
-          </a:ln>
-          <a:effectLst/>
-        </p:spPr>
-        <p:style>
-          <a:lnRef idx="1">
-            <a:schemeClr val="accent1"/>
-          </a:lnRef>
-          <a:fillRef idx="3">
-            <a:schemeClr val="accent1"/>
-          </a:fillRef>
-          <a:effectRef idx="2">
-            <a:schemeClr val="accent1"/>
-          </a:effectRef>
-          <a:fontRef idx="minor">
-            <a:schemeClr val="lt1"/>
-          </a:fontRef>
-        </p:style>
-        <p:txBody>
-          <a:bodyPr wrap="square" lIns="54864" tIns="0" rIns="36576" bIns="0" rtlCol="0" anchor="ctr"/>
-          <a:lstStyle/>
-          <a:p>
-            <a:pPr algn="l"/>
-            <a:r>
-              <a:rPr sz="1100" b="1">
-                <a:solidFill>
-                  <a:srgbClr val="FFFFFF"/>
-                </a:solidFill>
-                <a:latin typeface="Segoe UI"/>
-              </a:rPr>
-              <a:t>Rule</a:t>
-            </a:r>
-          </a:p>
-        </p:txBody>
-      </p:sp>
-      <p:sp>
-        <p:nvSpPr>
-          <p:cNvPr id="10" name="Rectangle 9"/>
-          <p:cNvSpPr/>
-          <p:nvPr/>
-        </p:nvSpPr>
-        <p:spPr>
-          <a:xfrm>
-            <a:off x="10287000" y="2057400"/>
-            <a:ext cx="1143000" cy="384048"/>
-          </a:xfrm>
-          <a:prstGeom prst="rect">
-            <a:avLst/>
-          </a:prstGeom>
-          <a:solidFill>
-            <a:srgbClr val="1F4E9C"/>
-          </a:solidFill>
-          <a:ln w="9525">
-            <a:solidFill>
-              <a:srgbClr val="C8D0E4"/>
-            </a:solidFill>
-          </a:ln>
-          <a:effectLst/>
-        </p:spPr>
-        <p:style>
-          <a:lnRef idx="1">
-            <a:schemeClr val="accent1"/>
-          </a:lnRef>
-          <a:fillRef idx="3">
-            <a:schemeClr val="accent1"/>
-          </a:fillRef>
-          <a:effectRef idx="2">
-            <a:schemeClr val="accent1"/>
-          </a:effectRef>
-          <a:fontRef idx="minor">
-            <a:schemeClr val="lt1"/>
-          </a:fontRef>
-        </p:style>
-        <p:txBody>
-          <a:bodyPr wrap="square" lIns="54864" tIns="0" rIns="36576" bIns="0" rtlCol="0" anchor="ctr"/>
-          <a:lstStyle/>
-          <a:p>
-            <a:pPr algn="ctr"/>
-            <a:r>
-              <a:rPr sz="1100" b="1">
-                <a:solidFill>
-                  <a:srgbClr val="FFFFFF"/>
-                </a:solidFill>
-                <a:latin typeface="Segoe UI"/>
-              </a:rPr>
-              <a:t>Limit</a:t>
-            </a:r>
-          </a:p>
-        </p:txBody>
-      </p:sp>
-      <p:sp>
-        <p:nvSpPr>
-          <p:cNvPr id="11" name="Rectangle 10"/>
-          <p:cNvSpPr/>
-          <p:nvPr/>
-        </p:nvSpPr>
-        <p:spPr>
-          <a:xfrm>
-            <a:off x="6537960" y="2441448"/>
-            <a:ext cx="1874519" cy="384048"/>
-          </a:xfrm>
-          <a:prstGeom prst="rect">
-            <a:avLst/>
-          </a:prstGeom>
-          <a:solidFill>
-            <a:srgbClr val="EEF2FB"/>
-          </a:solidFill>
-          <a:ln w="9525">
-            <a:solidFill>
-              <a:srgbClr val="C8D0E4"/>
-            </a:solidFill>
-          </a:ln>
-          <a:effectLst/>
-        </p:spPr>
-        <p:style>
-          <a:lnRef idx="1">
-            <a:schemeClr val="accent1"/>
-          </a:lnRef>
-          <a:fillRef idx="3">
-            <a:schemeClr val="accent1"/>
-          </a:fillRef>
-          <a:effectRef idx="2">
-            <a:schemeClr val="accent1"/>
-          </a:effectRef>
-          <a:fontRef idx="minor">
-            <a:schemeClr val="lt1"/>
-          </a:fontRef>
-        </p:style>
-        <p:txBody>
-          <a:bodyPr wrap="square" lIns="54864" tIns="0" rIns="36576" bIns="0" rtlCol="0" anchor="ctr"/>
-          <a:lstStyle/>
-          <a:p>
-            <a:pPr algn="l"/>
-            <a:r>
-              <a:rPr sz="1100" b="0">
-                <a:solidFill>
-                  <a:srgbClr val="141828"/>
-                </a:solidFill>
-                <a:latin typeface="Segoe UI"/>
-              </a:rPr>
-              <a:t>No history</a:t>
-            </a:r>
-          </a:p>
-        </p:txBody>
-      </p:sp>
-      <p:sp>
-        <p:nvSpPr>
-          <p:cNvPr id="12" name="Rectangle 11"/>
-          <p:cNvSpPr/>
-          <p:nvPr/>
-        </p:nvSpPr>
-        <p:spPr>
-          <a:xfrm>
-            <a:off x="8412480" y="2441448"/>
-            <a:ext cx="1874519" cy="384048"/>
-          </a:xfrm>
-          <a:prstGeom prst="rect">
-            <a:avLst/>
-          </a:prstGeom>
-          <a:solidFill>
-            <a:srgbClr val="EEF2FB"/>
-          </a:solidFill>
-          <a:ln w="9525">
-            <a:solidFill>
-              <a:srgbClr val="C8D0E4"/>
-            </a:solidFill>
-          </a:ln>
-          <a:effectLst/>
-        </p:spPr>
-        <p:style>
-          <a:lnRef idx="1">
-            <a:schemeClr val="accent1"/>
-          </a:lnRef>
-          <a:fillRef idx="3">
-            <a:schemeClr val="accent1"/>
-          </a:fillRef>
-          <a:effectRef idx="2">
-            <a:schemeClr val="accent1"/>
-          </a:effectRef>
-          <a:fontRef idx="minor">
-            <a:schemeClr val="lt1"/>
-          </a:fontRef>
-        </p:style>
-        <p:txBody>
-          <a:bodyPr wrap="square" lIns="54864" tIns="0" rIns="36576" bIns="0" rtlCol="0" anchor="ctr"/>
-          <a:lstStyle/>
-          <a:p>
-            <a:pPr algn="l"/>
-            <a:r>
-              <a:rPr sz="1100" b="0">
-                <a:solidFill>
-                  <a:srgbClr val="141828"/>
-                </a:solidFill>
-                <a:latin typeface="Segoe UI"/>
-              </a:rPr>
-              <a:t>—</a:t>
-            </a:r>
-          </a:p>
-        </p:txBody>
-      </p:sp>
-      <p:sp>
-        <p:nvSpPr>
-          <p:cNvPr id="13" name="Rectangle 12"/>
-          <p:cNvSpPr/>
-          <p:nvPr/>
-        </p:nvSpPr>
-        <p:spPr>
-          <a:xfrm>
-            <a:off x="10287000" y="2441448"/>
-            <a:ext cx="1143000" cy="384048"/>
-          </a:xfrm>
-          <a:prstGeom prst="rect">
-            <a:avLst/>
-          </a:prstGeom>
-          <a:solidFill>
-            <a:srgbClr val="EEF2FB"/>
-          </a:solidFill>
-          <a:ln w="9525">
-            <a:solidFill>
-              <a:srgbClr val="C8D0E4"/>
-            </a:solidFill>
-          </a:ln>
-          <a:effectLst/>
-        </p:spPr>
-        <p:style>
-          <a:lnRef idx="1">
-            <a:schemeClr val="accent1"/>
-          </a:lnRef>
-          <a:fillRef idx="3">
-            <a:schemeClr val="accent1"/>
-          </a:fillRef>
-          <a:effectRef idx="2">
-            <a:schemeClr val="accent1"/>
-          </a:effectRef>
-          <a:fontRef idx="minor">
-            <a:schemeClr val="lt1"/>
-          </a:fontRef>
-        </p:style>
-        <p:txBody>
-          <a:bodyPr wrap="square" lIns="54864" tIns="0" rIns="36576" bIns="0" rtlCol="0" anchor="ctr"/>
-          <a:lstStyle/>
-          <a:p>
-            <a:pPr algn="ctr"/>
-            <a:r>
-              <a:rPr sz="1100" b="1">
-                <a:solidFill>
-                  <a:srgbClr val="141828"/>
-                </a:solidFill>
-                <a:latin typeface="Segoe UI"/>
-              </a:rPr>
-              <a:t>12</a:t>
-            </a:r>
-          </a:p>
-        </p:txBody>
-      </p:sp>
-      <p:sp>
-        <p:nvSpPr>
-          <p:cNvPr id="14" name="Rectangle 13"/>
-          <p:cNvSpPr/>
-          <p:nvPr/>
-        </p:nvSpPr>
-        <p:spPr>
-          <a:xfrm>
-            <a:off x="6537960" y="2825496"/>
-            <a:ext cx="1874519" cy="384048"/>
-          </a:xfrm>
-          <a:prstGeom prst="rect">
-            <a:avLst/>
-          </a:prstGeom>
-          <a:solidFill>
-            <a:srgbClr val="FFFFFF"/>
-          </a:solidFill>
-          <a:ln w="9525">
-            <a:solidFill>
-              <a:srgbClr val="C8D0E4"/>
-            </a:solidFill>
-          </a:ln>
-          <a:effectLst/>
-        </p:spPr>
-        <p:style>
-          <a:lnRef idx="1">
-            <a:schemeClr val="accent1"/>
-          </a:lnRef>
-          <a:fillRef idx="3">
-            <a:schemeClr val="accent1"/>
-          </a:fillRef>
-          <a:effectRef idx="2">
-            <a:schemeClr val="accent1"/>
-          </a:effectRef>
-          <a:fontRef idx="minor">
-            <a:schemeClr val="lt1"/>
-          </a:fontRef>
-        </p:style>
-        <p:txBody>
-          <a:bodyPr wrap="square" lIns="54864" tIns="0" rIns="36576" bIns="0" rtlCol="0" anchor="ctr"/>
-          <a:lstStyle/>
-          <a:p>
-            <a:pPr algn="l"/>
-            <a:r>
-              <a:rPr sz="1100" b="0">
-                <a:solidFill>
-                  <a:srgbClr val="141828"/>
-                </a:solidFill>
-                <a:latin typeface="Segoe UI"/>
-              </a:rPr>
-              <a:t>3 losses, 3 kills</a:t>
-            </a:r>
-          </a:p>
-        </p:txBody>
-      </p:sp>
-      <p:sp>
-        <p:nvSpPr>
-          <p:cNvPr id="15" name="Rectangle 14"/>
-          <p:cNvSpPr/>
-          <p:nvPr/>
-        </p:nvSpPr>
-        <p:spPr>
-          <a:xfrm>
-            <a:off x="8412480" y="2825496"/>
-            <a:ext cx="1874519" cy="384048"/>
-          </a:xfrm>
-          <a:prstGeom prst="rect">
-            <a:avLst/>
-          </a:prstGeom>
-          <a:solidFill>
-            <a:srgbClr val="FFFFFF"/>
-          </a:solidFill>
-          <a:ln w="9525">
-            <a:solidFill>
-              <a:srgbClr val="C8D0E4"/>
-            </a:solidFill>
-          </a:ln>
-          <a:effectLst/>
-        </p:spPr>
-        <p:style>
-          <a:lnRef idx="1">
-            <a:schemeClr val="accent1"/>
-          </a:lnRef>
-          <a:fillRef idx="3">
-            <a:schemeClr val="accent1"/>
-          </a:fillRef>
-          <a:effectRef idx="2">
-            <a:schemeClr val="accent1"/>
-          </a:effectRef>
-          <a:fontRef idx="minor">
-            <a:schemeClr val="lt1"/>
-          </a:fontRef>
-        </p:style>
-        <p:txBody>
-          <a:bodyPr wrap="square" lIns="54864" tIns="0" rIns="36576" bIns="0" rtlCol="0" anchor="ctr"/>
-          <a:lstStyle/>
-          <a:p>
-            <a:pPr algn="l"/>
-            <a:r>
-              <a:rPr sz="1100" b="0">
-                <a:solidFill>
-                  <a:srgbClr val="141828"/>
-                </a:solidFill>
-                <a:latin typeface="Segoe UI"/>
-              </a:rPr>
-              <a:t>low_kill_loss 1.00</a:t>
-            </a:r>
-          </a:p>
-        </p:txBody>
-      </p:sp>
-      <p:sp>
-        <p:nvSpPr>
-          <p:cNvPr id="16" name="Rectangle 15"/>
-          <p:cNvSpPr/>
-          <p:nvPr/>
-        </p:nvSpPr>
-        <p:spPr>
-          <a:xfrm>
-            <a:off x="10287000" y="2825496"/>
-            <a:ext cx="1143000" cy="384048"/>
-          </a:xfrm>
-          <a:prstGeom prst="rect">
-            <a:avLst/>
-          </a:prstGeom>
-          <a:solidFill>
-            <a:srgbClr val="FFFFFF"/>
-          </a:solidFill>
-          <a:ln w="9525">
-            <a:solidFill>
-              <a:srgbClr val="C8D0E4"/>
-            </a:solidFill>
-          </a:ln>
-          <a:effectLst/>
-        </p:spPr>
-        <p:style>
-          <a:lnRef idx="1">
-            <a:schemeClr val="accent1"/>
-          </a:lnRef>
-          <a:fillRef idx="3">
-            <a:schemeClr val="accent1"/>
-          </a:fillRef>
-          <a:effectRef idx="2">
-            <a:schemeClr val="accent1"/>
-          </a:effectRef>
-          <a:fontRef idx="minor">
-            <a:schemeClr val="lt1"/>
-          </a:fontRef>
-        </p:style>
-        <p:txBody>
-          <a:bodyPr wrap="square" lIns="54864" tIns="0" rIns="36576" bIns="0" rtlCol="0" anchor="ctr"/>
-          <a:lstStyle/>
-          <a:p>
-            <a:pPr algn="ctr"/>
-            <a:r>
-              <a:rPr sz="1100" b="1">
-                <a:solidFill>
-                  <a:srgbClr val="B8531F"/>
-                </a:solidFill>
-                <a:latin typeface="Segoe UI"/>
-              </a:rPr>
-              <a:t>17</a:t>
-            </a:r>
-          </a:p>
-        </p:txBody>
-      </p:sp>
-      <p:sp>
-        <p:nvSpPr>
-          <p:cNvPr id="17" name="Rectangle 16"/>
-          <p:cNvSpPr/>
-          <p:nvPr/>
-        </p:nvSpPr>
-        <p:spPr>
-          <a:xfrm>
-            <a:off x="6537960" y="3209544"/>
-            <a:ext cx="1874519" cy="384048"/>
-          </a:xfrm>
-          <a:prstGeom prst="rect">
-            <a:avLst/>
-          </a:prstGeom>
-          <a:solidFill>
-            <a:srgbClr val="EEF2FB"/>
-          </a:solidFill>
-          <a:ln w="9525">
-            <a:solidFill>
-              <a:srgbClr val="C8D0E4"/>
-            </a:solidFill>
-          </a:ln>
-          <a:effectLst/>
-        </p:spPr>
-        <p:style>
-          <a:lnRef idx="1">
-            <a:schemeClr val="accent1"/>
-          </a:lnRef>
-          <a:fillRef idx="3">
-            <a:schemeClr val="accent1"/>
-          </a:fillRef>
-          <a:effectRef idx="2">
-            <a:schemeClr val="accent1"/>
-          </a:effectRef>
-          <a:fontRef idx="minor">
-            <a:schemeClr val="lt1"/>
-          </a:fontRef>
-        </p:style>
-        <p:txBody>
-          <a:bodyPr wrap="square" lIns="54864" tIns="0" rIns="36576" bIns="0" rtlCol="0" anchor="ctr"/>
-          <a:lstStyle/>
-          <a:p>
-            <a:pPr algn="l"/>
-            <a:r>
-              <a:rPr sz="1100" b="0">
-                <a:solidFill>
-                  <a:srgbClr val="141828"/>
-                </a:solidFill>
-                <a:latin typeface="Segoe UI"/>
-              </a:rPr>
-              <a:t>3 clears, 14 kills</a:t>
-            </a:r>
-          </a:p>
-        </p:txBody>
-      </p:sp>
-      <p:sp>
-        <p:nvSpPr>
-          <p:cNvPr id="18" name="Rectangle 17"/>
-          <p:cNvSpPr/>
-          <p:nvPr/>
-        </p:nvSpPr>
-        <p:spPr>
-          <a:xfrm>
-            <a:off x="8412480" y="3209544"/>
-            <a:ext cx="1874519" cy="384048"/>
-          </a:xfrm>
-          <a:prstGeom prst="rect">
-            <a:avLst/>
-          </a:prstGeom>
-          <a:solidFill>
-            <a:srgbClr val="EEF2FB"/>
-          </a:solidFill>
-          <a:ln w="9525">
-            <a:solidFill>
-              <a:srgbClr val="C8D0E4"/>
-            </a:solidFill>
-          </a:ln>
-          <a:effectLst/>
-        </p:spPr>
-        <p:style>
-          <a:lnRef idx="1">
-            <a:schemeClr val="accent1"/>
-          </a:lnRef>
-          <a:fillRef idx="3">
-            <a:schemeClr val="accent1"/>
-          </a:fillRef>
-          <a:effectRef idx="2">
-            <a:schemeClr val="accent1"/>
-          </a:effectRef>
-          <a:fontRef idx="minor">
-            <a:schemeClr val="lt1"/>
-          </a:fontRef>
-        </p:style>
-        <p:txBody>
-          <a:bodyPr wrap="square" lIns="54864" tIns="0" rIns="36576" bIns="0" rtlCol="0" anchor="ctr"/>
-          <a:lstStyle/>
-          <a:p>
-            <a:pPr algn="l"/>
-            <a:r>
-              <a:rPr sz="1100" b="0">
-                <a:solidFill>
-                  <a:srgbClr val="141828"/>
-                </a:solidFill>
-                <a:latin typeface="Segoe UI"/>
-              </a:rPr>
-              <a:t>high_kill_clear 1.00</a:t>
-            </a:r>
-          </a:p>
-        </p:txBody>
-      </p:sp>
-      <p:sp>
-        <p:nvSpPr>
-          <p:cNvPr id="19" name="Rectangle 18"/>
-          <p:cNvSpPr/>
-          <p:nvPr/>
-        </p:nvSpPr>
-        <p:spPr>
-          <a:xfrm>
-            <a:off x="10287000" y="3209544"/>
-            <a:ext cx="1143000" cy="384048"/>
-          </a:xfrm>
-          <a:prstGeom prst="rect">
-            <a:avLst/>
-          </a:prstGeom>
-          <a:solidFill>
-            <a:srgbClr val="EEF2FB"/>
-          </a:solidFill>
-          <a:ln w="9525">
-            <a:solidFill>
-              <a:srgbClr val="C8D0E4"/>
-            </a:solidFill>
-          </a:ln>
-          <a:effectLst/>
-        </p:spPr>
-        <p:style>
-          <a:lnRef idx="1">
-            <a:schemeClr val="accent1"/>
-          </a:lnRef>
-          <a:fillRef idx="3">
-            <a:schemeClr val="accent1"/>
-          </a:fillRef>
-          <a:effectRef idx="2">
-            <a:schemeClr val="accent1"/>
-          </a:effectRef>
-          <a:fontRef idx="minor">
-            <a:schemeClr val="lt1"/>
-          </a:fontRef>
-        </p:style>
-        <p:txBody>
-          <a:bodyPr wrap="square" lIns="54864" tIns="0" rIns="36576" bIns="0" rtlCol="0" anchor="ctr"/>
-          <a:lstStyle/>
-          <a:p>
-            <a:pPr algn="ctr"/>
-            <a:r>
-              <a:rPr sz="1100" b="1">
-                <a:solidFill>
-                  <a:srgbClr val="0F7D8C"/>
-                </a:solidFill>
-                <a:latin typeface="Segoe UI"/>
-              </a:rPr>
-              <a:t>14</a:t>
-            </a:r>
-          </a:p>
-        </p:txBody>
-      </p:sp>
-      <p:sp>
-        <p:nvSpPr>
-          <p:cNvPr id="20" name="Rectangle 19"/>
-          <p:cNvSpPr/>
-          <p:nvPr/>
-        </p:nvSpPr>
-        <p:spPr>
-          <a:xfrm>
-            <a:off x="6537960" y="3593591"/>
-            <a:ext cx="1874519" cy="384048"/>
-          </a:xfrm>
-          <a:prstGeom prst="rect">
-            <a:avLst/>
-          </a:prstGeom>
-          <a:solidFill>
-            <a:srgbClr val="FFFFFF"/>
-          </a:solidFill>
-          <a:ln w="9525">
-            <a:solidFill>
-              <a:srgbClr val="C8D0E4"/>
-            </a:solidFill>
-          </a:ln>
-          <a:effectLst/>
-        </p:spPr>
-        <p:style>
-          <a:lnRef idx="1">
-            <a:schemeClr val="accent1"/>
-          </a:lnRef>
-          <a:fillRef idx="3">
-            <a:schemeClr val="accent1"/>
-          </a:fillRef>
-          <a:effectRef idx="2">
-            <a:schemeClr val="accent1"/>
-          </a:effectRef>
-          <a:fontRef idx="minor">
-            <a:schemeClr val="lt1"/>
-          </a:fontRef>
-        </p:style>
-        <p:txBody>
-          <a:bodyPr wrap="square" lIns="54864" tIns="0" rIns="36576" bIns="0" rtlCol="0" anchor="ctr"/>
-          <a:lstStyle/>
-          <a:p>
-            <a:pPr algn="l"/>
-            <a:r>
-              <a:rPr sz="1100" b="0">
-                <a:solidFill>
-                  <a:srgbClr val="141828"/>
-                </a:solidFill>
-                <a:latin typeface="Segoe UI"/>
-              </a:rPr>
-              <a:t>Mixed results</a:t>
-            </a:r>
-          </a:p>
-        </p:txBody>
-      </p:sp>
-      <p:sp>
-        <p:nvSpPr>
-          <p:cNvPr id="21" name="Rectangle 20"/>
-          <p:cNvSpPr/>
-          <p:nvPr/>
-        </p:nvSpPr>
-        <p:spPr>
-          <a:xfrm>
-            <a:off x="8412480" y="3593591"/>
-            <a:ext cx="1874519" cy="384048"/>
-          </a:xfrm>
-          <a:prstGeom prst="rect">
-            <a:avLst/>
-          </a:prstGeom>
-          <a:solidFill>
-            <a:srgbClr val="FFFFFF"/>
-          </a:solidFill>
-          <a:ln w="9525">
-            <a:solidFill>
-              <a:srgbClr val="C8D0E4"/>
-            </a:solidFill>
-          </a:ln>
-          <a:effectLst/>
-        </p:spPr>
-        <p:style>
-          <a:lnRef idx="1">
-            <a:schemeClr val="accent1"/>
-          </a:lnRef>
-          <a:fillRef idx="3">
-            <a:schemeClr val="accent1"/>
-          </a:fillRef>
-          <a:effectRef idx="2">
-            <a:schemeClr val="accent1"/>
-          </a:effectRef>
-          <a:fontRef idx="minor">
-            <a:schemeClr val="lt1"/>
-          </a:fontRef>
-        </p:style>
-        <p:txBody>
-          <a:bodyPr wrap="square" lIns="54864" tIns="0" rIns="36576" bIns="0" rtlCol="0" anchor="ctr"/>
-          <a:lstStyle/>
-          <a:p>
-            <a:pPr algn="l"/>
-            <a:r>
-              <a:rPr sz="1100" b="0">
-                <a:solidFill>
-                  <a:srgbClr val="141828"/>
-                </a:solidFill>
-                <a:latin typeface="Segoe UI"/>
-              </a:rPr>
-              <a:t>none ≥ 0.50</a:t>
-            </a:r>
-          </a:p>
-        </p:txBody>
-      </p:sp>
-      <p:sp>
-        <p:nvSpPr>
-          <p:cNvPr id="22" name="Rectangle 21"/>
-          <p:cNvSpPr/>
-          <p:nvPr/>
-        </p:nvSpPr>
-        <p:spPr>
-          <a:xfrm>
-            <a:off x="10287000" y="3593591"/>
-            <a:ext cx="1143000" cy="384048"/>
-          </a:xfrm>
-          <a:prstGeom prst="rect">
-            <a:avLst/>
-          </a:prstGeom>
-          <a:solidFill>
-            <a:srgbClr val="FFFFFF"/>
-          </a:solidFill>
-          <a:ln w="9525">
-            <a:solidFill>
-              <a:srgbClr val="C8D0E4"/>
-            </a:solidFill>
-          </a:ln>
-          <a:effectLst/>
-        </p:spPr>
-        <p:style>
-          <a:lnRef idx="1">
-            <a:schemeClr val="accent1"/>
-          </a:lnRef>
-          <a:fillRef idx="3">
-            <a:schemeClr val="accent1"/>
-          </a:fillRef>
-          <a:effectRef idx="2">
-            <a:schemeClr val="accent1"/>
-          </a:effectRef>
-          <a:fontRef idx="minor">
-            <a:schemeClr val="lt1"/>
-          </a:fontRef>
-        </p:style>
-        <p:txBody>
-          <a:bodyPr wrap="square" lIns="54864" tIns="0" rIns="36576" bIns="0" rtlCol="0" anchor="ctr"/>
-          <a:lstStyle/>
-          <a:p>
-            <a:pPr algn="ctr"/>
-            <a:r>
-              <a:rPr sz="1100" b="1">
-                <a:solidFill>
-                  <a:srgbClr val="141828"/>
-                </a:solidFill>
-                <a:latin typeface="Segoe UI"/>
-              </a:rPr>
-              <a:t>12</a:t>
-            </a:r>
-          </a:p>
-        </p:txBody>
-      </p:sp>
-      <p:sp>
-        <p:nvSpPr>
-          <p:cNvPr id="23" name="Rounded Rectangle 22"/>
-          <p:cNvSpPr/>
-          <p:nvPr/>
-        </p:nvSpPr>
-        <p:spPr>
-          <a:xfrm>
-            <a:off x="6537960" y="4069080"/>
-            <a:ext cx="4892040" cy="1234440"/>
-          </a:xfrm>
-          <a:prstGeom prst="roundRect">
-            <a:avLst>
-              <a:gd name="adj" fmla="val 12000"/>
-            </a:avLst>
-          </a:prstGeom>
-          <a:solidFill>
-            <a:srgbClr val="E8F4F4"/>
-          </a:solidFill>
-          <a:ln>
-            <a:noFill/>
-          </a:ln>
-          <a:effectLst/>
-        </p:spPr>
-        <p:style>
-          <a:lnRef idx="1">
-            <a:schemeClr val="accent1"/>
-          </a:lnRef>
-          <a:fillRef idx="3">
-            <a:schemeClr val="accent1"/>
-          </a:fillRef>
-          <a:effectRef idx="2">
-            <a:schemeClr val="accent1"/>
-          </a:effectRef>
-          <a:fontRef idx="minor">
-            <a:schemeClr val="lt1"/>
-          </a:fontRef>
-        </p:style>
-        <p:txBody>
-          <a:bodyPr wrap="square" tIns="36576" bIns="36576" rtlCol="0" anchor="ctr"/>
-          <a:lstStyle/>
-          <a:p>
-            <a:pPr algn="ctr"/>
+              <a:rPr sz="1250" b="1">
+                <a:solidFill>
+                  <a:srgbClr val="141828"/>
+                </a:solidFill>
+                <a:latin typeface="Segoe UI"/>
+              </a:rPr>
+              <a:t>Environment kills count</a:t>
+            </a:r>
             <a:r>
               <a:rPr sz="1250" b="0">
                 <a:solidFill>
@@ -8402,43 +7291,7 @@
                 </a:solidFill>
                 <a:latin typeface="Segoe UI"/>
               </a:rPr>
-              <a:t>A level-5 player who dies every time looks identical to a level-5
-player who clears easily.  The fitness function cannot tell them
-apart — the mined rules can.</a:t>
-            </a:r>
-          </a:p>
-        </p:txBody>
-      </p:sp>
-      <p:sp>
-        <p:nvSpPr>
-          <p:cNvPr id="25" name="TextBox 24"/>
-          <p:cNvSpPr txBox="1"/>
-          <p:nvPr/>
-        </p:nvSpPr>
-        <p:spPr>
-          <a:xfrm>
-            <a:off x="502920" y="6309360"/>
-            <a:ext cx="9601200" cy="292608"/>
-          </a:xfrm>
-          <a:prstGeom prst="rect">
-            <a:avLst/>
-          </a:prstGeom>
-          <a:noFill/>
-        </p:spPr>
-        <p:txBody>
-          <a:bodyPr wrap="none" lIns="0" tIns="0" rIns="0" bIns="0">
-            <a:spAutoFit/>
-          </a:bodyPr>
-          <a:lstStyle/>
-          <a:p>
-            <a:r>
-              <a:rPr sz="1050" i="1">
-                <a:solidFill>
-                  <a:srgbClr val="5A6076"/>
-                </a:solidFill>
-                <a:latin typeface="Segoe UI"/>
-              </a:rPr>
-              <a:t>The Game Engine → Profile Manager → Map Generator flow is the feedback loop: recorded behaviour becomes the next level's difficulty.</a:t>
+              <a:t>: a monster that dies in lava goes through the same kill path as one shot by the player, so you still get the XP.</a:t>
             </a:r>
           </a:p>
         </p:txBody>
@@ -8550,7 +7403,7 @@
                 </a:solidFill>
                 <a:latin typeface="Segoe UI"/>
               </a:rPr>
-              <a:t>Monster AI</a:t>
+              <a:t>Data &amp; Persistence</a:t>
             </a:r>
           </a:p>
         </p:txBody>
@@ -8584,7 +7437,7 @@
                 </a:solidFill>
                 <a:latin typeface="Segoe UI"/>
               </a:rPr>
-              <a:t>One state machine, three personalities</a:t>
+              <a:t>One JSON document, no server</a:t>
             </a:r>
           </a:p>
         </p:txBody>
@@ -8619,14 +7472,14 @@
                 </a:solidFill>
                 <a:latin typeface="Segoe UI"/>
               </a:rPr>
-              <a:t>14 / 21</a:t>
+              <a:t>15 / 21</a:t>
             </a:r>
           </a:p>
         </p:txBody>
       </p:sp>
       <p:pic>
         <p:nvPicPr>
-          <p:cNvPr id="6" name="Picture 5" descr="fig_5_8_monster_ai_fsm.png"/>
+          <p:cNvPr id="6" name="Picture 5" descr="fig_5_9_er_diagram.png"/>
           <p:cNvPicPr>
             <a:picLocks noChangeAspect="1"/>
           </p:cNvPicPr>
@@ -8640,8 +7493,8 @@
         </p:blipFill>
         <p:spPr>
           <a:xfrm>
-            <a:off x="594360" y="1572768"/>
-            <a:ext cx="7315200" cy="3466178"/>
+            <a:off x="548640" y="1691640"/>
+            <a:ext cx="7309023" cy="4069080"/>
           </a:xfrm>
           <a:prstGeom prst="rect">
             <a:avLst/>
@@ -8656,8 +7509,8 @@
         </p:nvSpPr>
         <p:spPr>
           <a:xfrm>
-            <a:off x="8183879" y="1691640"/>
-            <a:ext cx="3520440" cy="3931920"/>
+            <a:off x="8001000" y="1783080"/>
+            <a:ext cx="3703320" cy="4023360"/>
           </a:xfrm>
           <a:prstGeom prst="rect">
             <a:avLst/>
@@ -8686,7 +7539,7 @@
                 </a:solidFill>
                 <a:latin typeface="Segoe UI"/>
               </a:rPr>
-              <a:t>DORMANT</a:t>
+              <a:t>Why JSON and not MySQL?</a:t>
             </a:r>
             <a:r>
               <a:rPr sz="1250" b="0">
@@ -8695,91 +7548,13 @@
                 </a:solidFill>
                 <a:latin typeface="Segoe UI"/>
               </a:rPr>
-              <a:t> → </a:t>
-            </a:r>
-            <a:r>
-              <a:rPr sz="1250" b="1">
-                <a:solidFill>
-                  <a:srgbClr val="141828"/>
-                </a:solidFill>
-                <a:latin typeface="Segoe UI"/>
-              </a:rPr>
-              <a:t>WAKE</a:t>
-            </a:r>
-            <a:r>
-              <a:rPr sz="1250" b="0">
-                <a:solidFill>
-                  <a:srgbClr val="141828"/>
-                </a:solidFill>
-                <a:latin typeface="Segoe UI"/>
-              </a:rPr>
-              <a:t> → </a:t>
-            </a:r>
-            <a:r>
-              <a:rPr sz="1250" b="1">
-                <a:solidFill>
-                  <a:srgbClr val="141828"/>
-                </a:solidFill>
-                <a:latin typeface="Segoe UI"/>
-              </a:rPr>
-              <a:t>CHASE</a:t>
-            </a:r>
-            <a:r>
-              <a:rPr sz="1250" b="0">
-                <a:solidFill>
-                  <a:srgbClr val="141828"/>
-                </a:solidFill>
-                <a:latin typeface="Segoe UI"/>
-              </a:rPr>
-              <a:t> → </a:t>
-            </a:r>
-            <a:r>
-              <a:rPr sz="1250" b="1">
-                <a:solidFill>
-                  <a:srgbClr val="141828"/>
-                </a:solidFill>
-                <a:latin typeface="Segoe UI"/>
-              </a:rPr>
-              <a:t>ATTACK</a:t>
+              <a:t>  The game is single-player and entirely local. A database server would add installation and maintenance for no benefit, and JSON needs no schema migration.</a:t>
             </a:r>
           </a:p>
           <a:p>
             <a:pPr algn="l">
               <a:spcAft>
-                <a:spcPts val="700"/>
-              </a:spcAft>
-            </a:pPr>
-            <a:endParaRPr sz="1250" b="1">
-              <a:solidFill>
-                <a:srgbClr val="141828"/>
-              </a:solidFill>
-              <a:latin typeface="Segoe UI"/>
-            </a:endParaRPr>
-          </a:p>
-          <a:p>
-            <a:pPr marL="219456" indent="-219456" algn="l"/>
-            <a:r>
-              <a:rPr sz="1150" b="1">
-                <a:solidFill>
-                  <a:srgbClr val="1F4E9C"/>
-                </a:solidFill>
-              </a:rPr>
-              <a:t>▪   </a:t>
-            </a:r>
-            <a:r>
-              <a:rPr sz="1250" b="0">
-                <a:solidFill>
-                  <a:srgbClr val="141828"/>
-                </a:solidFill>
-                <a:latin typeface="Segoe UI"/>
-              </a:rPr>
-              <a:t>A monster does not think at all while dormant — that is what makes exploration safe until you get close.</a:t>
-            </a:r>
-          </a:p>
-          <a:p>
-            <a:pPr algn="l">
-              <a:spcAft>
-                <a:spcPts val="700"/>
+                <a:spcPts val="800"/>
               </a:spcAft>
             </a:pPr>
             <a:endParaRPr sz="1250" b="0">
@@ -8806,7 +7581,7 @@
                 </a:solidFill>
                 <a:latin typeface="Segoe UI"/>
               </a:rPr>
-              <a:t>Chase uses genuine A* paths</a:t>
+              <a:t>Human-readable for testing</a:t>
             </a:r>
             <a:r>
               <a:rPr sz="1250" b="0">
@@ -8815,13 +7590,13 @@
                 </a:solidFill>
                 <a:latin typeface="Segoe UI"/>
               </a:rPr>
-              <a:t>, on the monster's own movement tick rather than every frame.</a:t>
+              <a:t> — we verified telemetry by reading the file directly rather than trusting the UI.</a:t>
             </a:r>
           </a:p>
           <a:p>
             <a:pPr algn="l">
               <a:spcAft>
-                <a:spcPts val="700"/>
+                <a:spcPts val="800"/>
               </a:spcAft>
             </a:pPr>
             <a:endParaRPr sz="1250" b="0">
@@ -8848,7 +7623,7 @@
                 </a:solidFill>
                 <a:latin typeface="Segoe UI"/>
               </a:rPr>
-              <a:t>monster3's leash is enforced per step</a:t>
+              <a:t>Run rollback</a:t>
             </a:r>
             <a:r>
               <a:rPr sz="1250" b="0">
@@ -8857,13 +7632,13 @@
                 </a:solidFill>
                 <a:latin typeface="Segoe UI"/>
               </a:rPr>
-              <a:t>, so it can never escape — which also guarantees the Door Key it drops is always reachable.</a:t>
+              <a:t> —  the profile, items and equipped slots are deep-copied at the start of each level. Death restores that baseline, then re-applies only coins, item usage and the run counters.</a:t>
             </a:r>
           </a:p>
           <a:p>
             <a:pPr algn="l">
               <a:spcAft>
-                <a:spcPts val="700"/>
+                <a:spcPts val="800"/>
               </a:spcAft>
             </a:pPr>
             <a:endParaRPr sz="1250" b="0">
@@ -8890,7 +7665,7 @@
                 </a:solidFill>
                 <a:latin typeface="Segoe UI"/>
               </a:rPr>
-              <a:t>Environment kills count</a:t>
+              <a:t>Thread safety</a:t>
             </a:r>
             <a:r>
               <a:rPr sz="1250" b="0">
@@ -8899,7 +7674,7 @@
                 </a:solidFill>
                 <a:latin typeface="Segoe UI"/>
               </a:rPr>
-              <a:t>: a monster that dies in lava goes through the same kill path as one shot by the player, so you still get the XP.</a:t>
+              <a:t> —  every write passes a threading.Lock; session events are queued and drained once per frame.</a:t>
             </a:r>
           </a:p>
         </p:txBody>
@@ -9011,7 +7786,7 @@
                 </a:solidFill>
                 <a:latin typeface="Segoe UI"/>
               </a:rPr>
-              <a:t>Data &amp; Persistence</a:t>
+              <a:t>Diagrams</a:t>
             </a:r>
           </a:p>
         </p:txBody>
@@ -9045,7 +7820,7 @@
                 </a:solidFill>
                 <a:latin typeface="Segoe UI"/>
               </a:rPr>
-              <a:t>One JSON document, no server</a:t>
+              <a:t>Data flow and use case</a:t>
             </a:r>
           </a:p>
         </p:txBody>
@@ -9080,14 +7855,14 @@
                 </a:solidFill>
                 <a:latin typeface="Segoe UI"/>
               </a:rPr>
-              <a:t>15 / 21</a:t>
+              <a:t>16 / 21</a:t>
             </a:r>
           </a:p>
         </p:txBody>
       </p:sp>
       <p:pic>
         <p:nvPicPr>
-          <p:cNvPr id="6" name="Picture 5" descr="fig_5_9_er_diagram.png"/>
+          <p:cNvPr id="6" name="Picture 5"/>
           <p:cNvPicPr>
             <a:picLocks noChangeAspect="1"/>
           </p:cNvPicPr>
@@ -9095,194 +7870,94 @@
         </p:nvPicPr>
         <p:blipFill>
           <a:blip r:embed="rId3"/>
-          <a:stretch>
-            <a:fillRect/>
-          </a:stretch>
+          <a:srcRect/>
+          <a:stretch/>
         </p:blipFill>
         <p:spPr>
           <a:xfrm>
-            <a:off x="548640" y="1691640"/>
-            <a:ext cx="7309023" cy="4069080"/>
+            <a:off x="1035995" y="2103119"/>
+            <a:ext cx="4549465" cy="2370009"/>
           </a:xfrm>
           <a:prstGeom prst="rect">
             <a:avLst/>
           </a:prstGeom>
         </p:spPr>
       </p:pic>
-      <p:sp>
-        <p:nvSpPr>
-          <p:cNvPr id="7" name="TextBox 6"/>
-          <p:cNvSpPr txBox="1"/>
-          <p:nvPr/>
-        </p:nvSpPr>
-        <p:spPr>
-          <a:xfrm>
-            <a:off x="8001000" y="1783080"/>
-            <a:ext cx="3703320" cy="4023360"/>
+      <p:pic>
+        <p:nvPicPr>
+          <p:cNvPr id="7" name="Picture 6"/>
+          <p:cNvPicPr>
+            <a:picLocks noChangeAspect="1"/>
+          </p:cNvPicPr>
+          <p:nvPr/>
+        </p:nvPicPr>
+        <p:blipFill>
+          <a:blip r:embed="rId4"/>
+          <a:srcRect/>
+          <a:stretch/>
+        </p:blipFill>
+        <p:spPr>
+          <a:xfrm>
+            <a:off x="7269409" y="1024128"/>
+            <a:ext cx="3516956" cy="3624072"/>
           </a:xfrm>
           <a:prstGeom prst="rect">
             <a:avLst/>
           </a:prstGeom>
-          <a:noFill/>
-        </p:spPr>
-        <p:txBody>
-          <a:bodyPr wrap="square" lIns="18288" tIns="0" rIns="18288" bIns="0">
-            <a:spAutoFit/>
-          </a:bodyPr>
-          <a:lstStyle/>
-          <a:p>
-            <a:pPr marL="219456" indent="-219456" algn="l"/>
-            <a:r>
-              <a:rPr sz="1150" b="1">
-                <a:solidFill>
-                  <a:srgbClr val="1F4E9C"/>
-                </a:solidFill>
-              </a:rPr>
-              <a:t>▪   </a:t>
-            </a:r>
-            <a:r>
-              <a:rPr sz="1250" b="1">
-                <a:solidFill>
-                  <a:srgbClr val="141828"/>
-                </a:solidFill>
-                <a:latin typeface="Segoe UI"/>
-              </a:rPr>
-              <a:t>Why JSON and not MySQL?</a:t>
-            </a:r>
-            <a:r>
-              <a:rPr sz="1250" b="0">
-                <a:solidFill>
-                  <a:srgbClr val="141828"/>
-                </a:solidFill>
-                <a:latin typeface="Segoe UI"/>
-              </a:rPr>
-              <a:t>  The game is single-player and entirely local. A database server would add installation and maintenance for no benefit, and JSON needs no schema migration.</a:t>
-            </a:r>
-          </a:p>
-          <a:p>
-            <a:pPr algn="l">
-              <a:spcAft>
-                <a:spcPts val="800"/>
-              </a:spcAft>
-            </a:pPr>
-            <a:endParaRPr sz="1250" b="0">
-              <a:solidFill>
-                <a:srgbClr val="141828"/>
-              </a:solidFill>
-              <a:latin typeface="Segoe UI"/>
-            </a:endParaRPr>
-          </a:p>
-          <a:p>
-            <a:pPr marL="219456" indent="-219456" algn="l"/>
-            <a:r>
-              <a:rPr sz="1150" b="1">
-                <a:solidFill>
-                  <a:srgbClr val="1F4E9C"/>
-                </a:solidFill>
-              </a:rPr>
-              <a:t>▪   </a:t>
-            </a:r>
-            <a:r>
-              <a:rPr sz="1250" b="1">
-                <a:solidFill>
-                  <a:srgbClr val="141828"/>
-                </a:solidFill>
-                <a:latin typeface="Segoe UI"/>
-              </a:rPr>
-              <a:t>Human-readable for testing</a:t>
-            </a:r>
-            <a:r>
-              <a:rPr sz="1250" b="0">
-                <a:solidFill>
-                  <a:srgbClr val="141828"/>
-                </a:solidFill>
-                <a:latin typeface="Segoe UI"/>
-              </a:rPr>
-              <a:t> — we verified telemetry by reading the file directly rather than trusting the UI.</a:t>
-            </a:r>
-          </a:p>
-          <a:p>
-            <a:pPr algn="l">
-              <a:spcAft>
-                <a:spcPts val="800"/>
-              </a:spcAft>
-            </a:pPr>
-            <a:endParaRPr sz="1250" b="0">
-              <a:solidFill>
-                <a:srgbClr val="141828"/>
-              </a:solidFill>
-              <a:latin typeface="Segoe UI"/>
-            </a:endParaRPr>
-          </a:p>
-          <a:p>
-            <a:pPr marL="219456" indent="-219456" algn="l"/>
-            <a:r>
-              <a:rPr sz="1150" b="1">
-                <a:solidFill>
-                  <a:srgbClr val="1F4E9C"/>
-                </a:solidFill>
-              </a:rPr>
-              <a:t>▪   </a:t>
-            </a:r>
-            <a:r>
-              <a:rPr sz="1250" b="1">
-                <a:solidFill>
-                  <a:srgbClr val="141828"/>
-                </a:solidFill>
-                <a:latin typeface="Segoe UI"/>
-              </a:rPr>
-              <a:t>Run rollback</a:t>
-            </a:r>
-            <a:r>
-              <a:rPr sz="1250" b="0">
-                <a:solidFill>
-                  <a:srgbClr val="141828"/>
-                </a:solidFill>
-                <a:latin typeface="Segoe UI"/>
-              </a:rPr>
-              <a:t> —  the profile, items and equipped slots are deep-copied at the start of each level. Death restores that baseline, then re-applies only coins, item usage and the run counters.</a:t>
-            </a:r>
-          </a:p>
-          <a:p>
-            <a:pPr algn="l">
-              <a:spcAft>
-                <a:spcPts val="800"/>
-              </a:spcAft>
-            </a:pPr>
-            <a:endParaRPr sz="1250" b="0">
-              <a:solidFill>
-                <a:srgbClr val="141828"/>
-              </a:solidFill>
-              <a:latin typeface="Segoe UI"/>
-            </a:endParaRPr>
-          </a:p>
-          <a:p>
-            <a:pPr marL="219456" indent="-219456" algn="l"/>
-            <a:r>
-              <a:rPr sz="1150" b="1">
-                <a:solidFill>
-                  <a:srgbClr val="1F4E9C"/>
-                </a:solidFill>
-              </a:rPr>
-              <a:t>▪   </a:t>
-            </a:r>
-            <a:r>
-              <a:rPr sz="1250" b="1">
-                <a:solidFill>
-                  <a:srgbClr val="141828"/>
-                </a:solidFill>
-                <a:latin typeface="Segoe UI"/>
-              </a:rPr>
-              <a:t>Thread safety</a:t>
-            </a:r>
-            <a:r>
-              <a:rPr sz="1250" b="0">
-                <a:solidFill>
-                  <a:srgbClr val="141828"/>
-                </a:solidFill>
-                <a:latin typeface="Segoe UI"/>
-              </a:rPr>
-              <a:t> —  every write passes a threading.Lock; session events are queued and drained once per frame.</a:t>
+        </p:spPr>
+      </p:pic>
+      <p:sp>
+        <p:nvSpPr>
+          <p:cNvPr id="8" name="Rounded Rectangle 7"/>
+          <p:cNvSpPr/>
+          <p:nvPr/>
+        </p:nvSpPr>
+        <p:spPr>
+          <a:xfrm>
+            <a:off x="685800" y="4800600"/>
+            <a:ext cx="10835640" cy="1097280"/>
+          </a:xfrm>
+          <a:prstGeom prst="roundRect">
+            <a:avLst>
+              <a:gd name="adj" fmla="val 12000"/>
+            </a:avLst>
+          </a:prstGeom>
+          <a:solidFill>
+            <a:srgbClr val="EEF2FB"/>
+          </a:solidFill>
+          <a:ln>
+            <a:noFill/>
+          </a:ln>
+          <a:effectLst/>
+        </p:spPr>
+        <p:style>
+          <a:lnRef idx="1">
+            <a:schemeClr val="accent1"/>
+          </a:lnRef>
+          <a:fillRef idx="3">
+            <a:schemeClr val="accent1"/>
+          </a:fillRef>
+          <a:effectRef idx="2">
+            <a:schemeClr val="accent1"/>
+          </a:effectRef>
+          <a:fontRef idx="minor">
+            <a:schemeClr val="lt1"/>
+          </a:fontRef>
+        </p:style>
+        <p:txBody>
+          <a:bodyPr wrap="square" tIns="36576" bIns="36576" rtlCol="0" anchor="ctr"/>
+          <a:lstStyle/>
+          <a:p>
+            <a:pPr algn="ctr"/>
+            <a:r>
+              <a:rPr sz="1300" b="0">
+                <a:solidFill>
+                  <a:srgbClr val="141828"/>
+                </a:solidFill>
+                <a:latin typeface="Segoe UI"/>
+              </a:rPr>
+              <a:t>The single most important flow in the whole system:  Game Engine  →  Profile Manager  →  Map Generator
+The player's recorded level, kill history and item usage travel back into generation — that is the feedback loop, drawn as a data flow.</a:t>
             </a:r>
           </a:p>
         </p:txBody>
@@ -9394,905 +8069,6 @@
                 </a:solidFill>
                 <a:latin typeface="Segoe UI"/>
               </a:rPr>
-              <a:t>Diagrams</a:t>
-            </a:r>
-          </a:p>
-        </p:txBody>
-      </p:sp>
-      <p:sp>
-        <p:nvSpPr>
-          <p:cNvPr id="4" name="TextBox 3"/>
-          <p:cNvSpPr txBox="1"/>
-          <p:nvPr/>
-        </p:nvSpPr>
-        <p:spPr>
-          <a:xfrm>
-            <a:off x="768096" y="969264"/>
-            <a:ext cx="10881360" cy="310896"/>
-          </a:xfrm>
-          <a:prstGeom prst="rect">
-            <a:avLst/>
-          </a:prstGeom>
-          <a:noFill/>
-        </p:spPr>
-        <p:txBody>
-          <a:bodyPr wrap="square" lIns="0" tIns="0" rIns="0" bIns="0">
-            <a:spAutoFit/>
-          </a:bodyPr>
-          <a:lstStyle/>
-          <a:p>
-            <a:r>
-              <a:rPr sz="1350" i="1">
-                <a:solidFill>
-                  <a:srgbClr val="5A6076"/>
-                </a:solidFill>
-                <a:latin typeface="Segoe UI"/>
-              </a:rPr>
-              <a:t>Data flow and use case</a:t>
-            </a:r>
-          </a:p>
-        </p:txBody>
-      </p:sp>
-      <p:sp>
-        <p:nvSpPr>
-          <p:cNvPr id="5" name="TextBox 4"/>
-          <p:cNvSpPr txBox="1"/>
-          <p:nvPr/>
-        </p:nvSpPr>
-        <p:spPr>
-          <a:xfrm>
-            <a:off x="10515600" y="6327648"/>
-            <a:ext cx="1280160" cy="310896"/>
-          </a:xfrm>
-          <a:prstGeom prst="rect">
-            <a:avLst/>
-          </a:prstGeom>
-          <a:noFill/>
-        </p:spPr>
-        <p:txBody>
-          <a:bodyPr wrap="none" lIns="0" tIns="0" rIns="0" bIns="0">
-            <a:spAutoFit/>
-          </a:bodyPr>
-          <a:lstStyle/>
-          <a:p>
-            <a:pPr algn="r"/>
-            <a:r>
-              <a:rPr sz="1000">
-                <a:solidFill>
-                  <a:srgbClr val="8A90A4"/>
-                </a:solidFill>
-                <a:latin typeface="Segoe UI"/>
-              </a:rPr>
-              <a:t>16 / 21</a:t>
-            </a:r>
-          </a:p>
-        </p:txBody>
-      </p:sp>
-      <p:pic>
-        <p:nvPicPr>
-          <p:cNvPr id="6" name="Picture 5"/>
-          <p:cNvPicPr>
-            <a:picLocks noChangeAspect="1"/>
-          </p:cNvPicPr>
-          <p:nvPr/>
-        </p:nvPicPr>
-        <p:blipFill>
-          <a:blip r:embed="rId3"/>
-          <a:srcRect/>
-          <a:stretch/>
-        </p:blipFill>
-        <p:spPr>
-          <a:xfrm>
-            <a:off x="1035995" y="2103119"/>
-            <a:ext cx="4549465" cy="2370009"/>
-          </a:xfrm>
-          <a:prstGeom prst="rect">
-            <a:avLst/>
-          </a:prstGeom>
-        </p:spPr>
-      </p:pic>
-      <p:pic>
-        <p:nvPicPr>
-          <p:cNvPr id="7" name="Picture 6"/>
-          <p:cNvPicPr>
-            <a:picLocks noChangeAspect="1"/>
-          </p:cNvPicPr>
-          <p:nvPr/>
-        </p:nvPicPr>
-        <p:blipFill>
-          <a:blip r:embed="rId4"/>
-          <a:srcRect/>
-          <a:stretch/>
-        </p:blipFill>
-        <p:spPr>
-          <a:xfrm>
-            <a:off x="7269409" y="1024128"/>
-            <a:ext cx="3516956" cy="3624072"/>
-          </a:xfrm>
-          <a:prstGeom prst="rect">
-            <a:avLst/>
-          </a:prstGeom>
-        </p:spPr>
-      </p:pic>
-      <p:sp>
-        <p:nvSpPr>
-          <p:cNvPr id="8" name="Rounded Rectangle 7"/>
-          <p:cNvSpPr/>
-          <p:nvPr/>
-        </p:nvSpPr>
-        <p:spPr>
-          <a:xfrm>
-            <a:off x="685800" y="4800600"/>
-            <a:ext cx="10835640" cy="1097280"/>
-          </a:xfrm>
-          <a:prstGeom prst="roundRect">
-            <a:avLst>
-              <a:gd name="adj" fmla="val 12000"/>
-            </a:avLst>
-          </a:prstGeom>
-          <a:solidFill>
-            <a:srgbClr val="EEF2FB"/>
-          </a:solidFill>
-          <a:ln>
-            <a:noFill/>
-          </a:ln>
-          <a:effectLst/>
-        </p:spPr>
-        <p:style>
-          <a:lnRef idx="1">
-            <a:schemeClr val="accent1"/>
-          </a:lnRef>
-          <a:fillRef idx="3">
-            <a:schemeClr val="accent1"/>
-          </a:fillRef>
-          <a:effectRef idx="2">
-            <a:schemeClr val="accent1"/>
-          </a:effectRef>
-          <a:fontRef idx="minor">
-            <a:schemeClr val="lt1"/>
-          </a:fontRef>
-        </p:style>
-        <p:txBody>
-          <a:bodyPr wrap="square" tIns="36576" bIns="36576" rtlCol="0" anchor="ctr"/>
-          <a:lstStyle/>
-          <a:p>
-            <a:pPr algn="ctr"/>
-            <a:r>
-              <a:rPr sz="1300" b="0">
-                <a:solidFill>
-                  <a:srgbClr val="141828"/>
-                </a:solidFill>
-                <a:latin typeface="Segoe UI"/>
-              </a:rPr>
-              <a:t>The single most important flow in the whole system:  Game Engine  →  Profile Manager  →  Map Generator
-The player's recorded level, kill history and item usage travel back into generation — that is the feedback loop, drawn as a data flow.</a:t>
-            </a:r>
-          </a:p>
-        </p:txBody>
-      </p:sp>
-    </p:spTree>
-  </p:cSld>
-  <p:clrMapOvr>
-    <a:masterClrMapping/>
-  </p:clrMapOvr>
-</p:sld>
-</file>
-
-<file path=ppt/slides/slide17.xml><?xml version="1.0" encoding="utf-8"?>
-<p:sld xmlns:a="http://schemas.openxmlformats.org/drawingml/2006/main" xmlns:r="http://schemas.openxmlformats.org/officeDocument/2006/relationships" xmlns:p="http://schemas.openxmlformats.org/presentationml/2006/main">
-  <p:cSld>
-    <p:bg>
-      <p:bgPr>
-        <a:solidFill>
-          <a:srgbClr val="FFFFFF"/>
-        </a:solidFill>
-        <a:effectLst/>
-      </p:bgPr>
-    </p:bg>
-    <p:spTree>
-      <p:nvGrpSpPr>
-        <p:cNvPr id="1" name=""/>
-        <p:cNvGrpSpPr/>
-        <p:nvPr/>
-      </p:nvGrpSpPr>
-      <p:grpSpPr>
-        <a:xfrm>
-          <a:off x="0" y="0"/>
-          <a:ext cx="0" cy="0"/>
-          <a:chOff x="0" y="0"/>
-          <a:chExt cx="0" cy="0"/>
-        </a:xfrm>
-      </p:grpSpPr>
-      <p:sp>
-        <p:nvSpPr>
-          <p:cNvPr id="2" name="Rectangle 1"/>
-          <p:cNvSpPr/>
-          <p:nvPr/>
-        </p:nvSpPr>
-        <p:spPr>
-          <a:xfrm>
-            <a:off x="502920" y="384048"/>
-            <a:ext cx="91440" cy="566928"/>
-          </a:xfrm>
-          <a:prstGeom prst="rect">
-            <a:avLst/>
-          </a:prstGeom>
-          <a:solidFill>
-            <a:srgbClr val="1F4E9C"/>
-          </a:solidFill>
-          <a:ln>
-            <a:noFill/>
-          </a:ln>
-          <a:effectLst/>
-        </p:spPr>
-        <p:style>
-          <a:lnRef idx="1">
-            <a:schemeClr val="accent1"/>
-          </a:lnRef>
-          <a:fillRef idx="3">
-            <a:schemeClr val="accent1"/>
-          </a:fillRef>
-          <a:effectRef idx="2">
-            <a:schemeClr val="accent1"/>
-          </a:effectRef>
-          <a:fontRef idx="minor">
-            <a:schemeClr val="lt1"/>
-          </a:fontRef>
-        </p:style>
-        <p:txBody>
-          <a:bodyPr rtlCol="0" anchor="ctr"/>
-          <a:lstStyle/>
-          <a:p>
-            <a:pPr algn="ctr"/>
-            <a:endParaRPr/>
-          </a:p>
-        </p:txBody>
-      </p:sp>
-      <p:sp>
-        <p:nvSpPr>
-          <p:cNvPr id="3" name="TextBox 2"/>
-          <p:cNvSpPr txBox="1"/>
-          <p:nvPr/>
-        </p:nvSpPr>
-        <p:spPr>
-          <a:xfrm>
-            <a:off x="749808" y="310896"/>
-            <a:ext cx="10881360" cy="713232"/>
-          </a:xfrm>
-          <a:prstGeom prst="rect">
-            <a:avLst/>
-          </a:prstGeom>
-          <a:noFill/>
-        </p:spPr>
-        <p:txBody>
-          <a:bodyPr wrap="square" lIns="0" tIns="0" rIns="0" bIns="0">
-            <a:spAutoFit/>
-          </a:bodyPr>
-          <a:lstStyle/>
-          <a:p>
-            <a:r>
-              <a:rPr sz="2800" b="1">
-                <a:solidFill>
-                  <a:srgbClr val="141828"/>
-                </a:solidFill>
-                <a:latin typeface="Segoe UI"/>
-              </a:rPr>
-              <a:t>Challenges We Faced</a:t>
-            </a:r>
-          </a:p>
-        </p:txBody>
-      </p:sp>
-      <p:sp>
-        <p:nvSpPr>
-          <p:cNvPr id="4" name="TextBox 3"/>
-          <p:cNvSpPr txBox="1"/>
-          <p:nvPr/>
-        </p:nvSpPr>
-        <p:spPr>
-          <a:xfrm>
-            <a:off x="768096" y="969264"/>
-            <a:ext cx="10881360" cy="310896"/>
-          </a:xfrm>
-          <a:prstGeom prst="rect">
-            <a:avLst/>
-          </a:prstGeom>
-          <a:noFill/>
-        </p:spPr>
-        <p:txBody>
-          <a:bodyPr wrap="square" lIns="0" tIns="0" rIns="0" bIns="0">
-            <a:spAutoFit/>
-          </a:bodyPr>
-          <a:lstStyle/>
-          <a:p>
-            <a:r>
-              <a:rPr sz="1350" i="1">
-                <a:solidFill>
-                  <a:srgbClr val="5A6076"/>
-                </a:solidFill>
-                <a:latin typeface="Segoe UI"/>
-              </a:rPr>
-              <a:t>And what we learned</a:t>
-            </a:r>
-          </a:p>
-        </p:txBody>
-      </p:sp>
-      <p:sp>
-        <p:nvSpPr>
-          <p:cNvPr id="5" name="TextBox 4"/>
-          <p:cNvSpPr txBox="1"/>
-          <p:nvPr/>
-        </p:nvSpPr>
-        <p:spPr>
-          <a:xfrm>
-            <a:off x="10515600" y="6327648"/>
-            <a:ext cx="1280160" cy="310896"/>
-          </a:xfrm>
-          <a:prstGeom prst="rect">
-            <a:avLst/>
-          </a:prstGeom>
-          <a:noFill/>
-        </p:spPr>
-        <p:txBody>
-          <a:bodyPr wrap="none" lIns="0" tIns="0" rIns="0" bIns="0">
-            <a:spAutoFit/>
-          </a:bodyPr>
-          <a:lstStyle/>
-          <a:p>
-            <a:pPr algn="r"/>
-            <a:r>
-              <a:rPr sz="1000">
-                <a:solidFill>
-                  <a:srgbClr val="8A90A4"/>
-                </a:solidFill>
-                <a:latin typeface="Segoe UI"/>
-              </a:rPr>
-              <a:t>19 / 21</a:t>
-            </a:r>
-          </a:p>
-        </p:txBody>
-      </p:sp>
-      <p:sp>
-        <p:nvSpPr>
-          <p:cNvPr id="6" name="Rounded Rectangle 5"/>
-          <p:cNvSpPr/>
-          <p:nvPr/>
-        </p:nvSpPr>
-        <p:spPr>
-          <a:xfrm>
-            <a:off x="777240" y="1600200"/>
-            <a:ext cx="10835640" cy="822960"/>
-          </a:xfrm>
-          <a:prstGeom prst="roundRect">
-            <a:avLst>
-              <a:gd name="adj" fmla="val 10000"/>
-            </a:avLst>
-          </a:prstGeom>
-          <a:solidFill>
-            <a:srgbClr val="EEF2FB"/>
-          </a:solidFill>
-          <a:ln>
-            <a:noFill/>
-          </a:ln>
-          <a:effectLst/>
-        </p:spPr>
-        <p:style>
-          <a:lnRef idx="1">
-            <a:schemeClr val="accent1"/>
-          </a:lnRef>
-          <a:fillRef idx="3">
-            <a:schemeClr val="accent1"/>
-          </a:fillRef>
-          <a:effectRef idx="2">
-            <a:schemeClr val="accent1"/>
-          </a:effectRef>
-          <a:fontRef idx="minor">
-            <a:schemeClr val="lt1"/>
-          </a:fontRef>
-        </p:style>
-        <p:txBody>
-          <a:bodyPr wrap="square" lIns="164592" tIns="73152" bIns="36576" rtlCol="0" anchor="ctr"/>
-          <a:lstStyle/>
-          <a:p>
-            <a:pPr algn="l"/>
-            <a:r>
-              <a:rPr sz="1400" b="1">
-                <a:solidFill>
-                  <a:srgbClr val="1F4E9C"/>
-                </a:solidFill>
-                <a:latin typeface="Segoe UI"/>
-              </a:rPr>
-              <a:t>Making randomness produce good maps</a:t>
-            </a:r>
-          </a:p>
-          <a:p>
-            <a:pPr algn="l">
-              <a:spcBef>
-                <a:spcPts val="100"/>
-              </a:spcBef>
-            </a:pPr>
-            <a:r>
-              <a:rPr sz="1100">
-                <a:solidFill>
-                  <a:srgbClr val="141828"/>
-                </a:solidFill>
-                <a:latin typeface="Segoe UI"/>
-              </a:rPr>
-              <a:t>Pure noise is unplayable. The fix was to stop treating carving as the whole answer and split it: one stage creates the structure, a second measures it, a third repairs it, and only then is it scored.</a:t>
-            </a:r>
-          </a:p>
-          <a:p>
-            <a:pPr algn="l">
-              <a:spcBef>
-                <a:spcPts val="100"/>
-              </a:spcBef>
-            </a:pPr>
-            <a:r>
-              <a:rPr sz="1050" b="1">
-                <a:solidFill>
-                  <a:srgbClr val="0F7D8C"/>
-                </a:solidFill>
-                <a:latin typeface="Segoe UI"/>
-              </a:rPr>
-              <a:t>→  Split the problem; do not solve it in one pass</a:t>
-            </a:r>
-          </a:p>
-        </p:txBody>
-      </p:sp>
-      <p:sp>
-        <p:nvSpPr>
-          <p:cNvPr id="7" name="Rounded Rectangle 6"/>
-          <p:cNvSpPr/>
-          <p:nvPr/>
-        </p:nvSpPr>
-        <p:spPr>
-          <a:xfrm>
-            <a:off x="777240" y="2505456"/>
-            <a:ext cx="10835640" cy="822960"/>
-          </a:xfrm>
-          <a:prstGeom prst="roundRect">
-            <a:avLst>
-              <a:gd name="adj" fmla="val 10000"/>
-            </a:avLst>
-          </a:prstGeom>
-          <a:solidFill>
-            <a:srgbClr val="E8F4F4"/>
-          </a:solidFill>
-          <a:ln>
-            <a:noFill/>
-          </a:ln>
-          <a:effectLst/>
-        </p:spPr>
-        <p:style>
-          <a:lnRef idx="1">
-            <a:schemeClr val="accent1"/>
-          </a:lnRef>
-          <a:fillRef idx="3">
-            <a:schemeClr val="accent1"/>
-          </a:fillRef>
-          <a:effectRef idx="2">
-            <a:schemeClr val="accent1"/>
-          </a:effectRef>
-          <a:fontRef idx="minor">
-            <a:schemeClr val="lt1"/>
-          </a:fontRef>
-        </p:style>
-        <p:txBody>
-          <a:bodyPr wrap="square" lIns="164592" tIns="73152" bIns="36576" rtlCol="0" anchor="ctr"/>
-          <a:lstStyle/>
-          <a:p>
-            <a:pPr algn="l"/>
-            <a:r>
-              <a:rPr sz="1400" b="1">
-                <a:solidFill>
-                  <a:srgbClr val="1F4E9C"/>
-                </a:solidFill>
-                <a:latin typeface="Segoe UI"/>
-              </a:rPr>
-              <a:t>Keeping the generator reproducible</a:t>
-            </a:r>
-          </a:p>
-          <a:p>
-            <a:pPr algn="l">
-              <a:spcBef>
-                <a:spcPts val="100"/>
-              </a:spcBef>
-            </a:pPr>
-            <a:r>
-              <a:rPr sz="1100">
-                <a:solidFill>
-                  <a:srgbClr val="141828"/>
-                </a:solidFill>
-                <a:latin typeface="Segoe UI"/>
-              </a:rPr>
-              <a:t>An in-place cellular automata update made results depend on scan order, so the same seed gave different maps. Moving to a separate next-grid, as in Conway's Game of Life, fixed it.</a:t>
-            </a:r>
-          </a:p>
-          <a:p>
-            <a:pPr algn="l">
-              <a:spcBef>
-                <a:spcPts val="100"/>
-              </a:spcBef>
-            </a:pPr>
-            <a:r>
-              <a:rPr sz="1050" b="1">
-                <a:solidFill>
-                  <a:srgbClr val="0F7D8C"/>
-                </a:solidFill>
-                <a:latin typeface="Segoe UI"/>
-              </a:rPr>
-              <a:t>→  Determinism is a design constraint, not a happy accident</a:t>
-            </a:r>
-          </a:p>
-        </p:txBody>
-      </p:sp>
-      <p:sp>
-        <p:nvSpPr>
-          <p:cNvPr id="8" name="Rounded Rectangle 7"/>
-          <p:cNvSpPr/>
-          <p:nvPr/>
-        </p:nvSpPr>
-        <p:spPr>
-          <a:xfrm>
-            <a:off x="777240" y="3410712"/>
-            <a:ext cx="10835640" cy="822960"/>
-          </a:xfrm>
-          <a:prstGeom prst="roundRect">
-            <a:avLst>
-              <a:gd name="adj" fmla="val 10000"/>
-            </a:avLst>
-          </a:prstGeom>
-          <a:solidFill>
-            <a:srgbClr val="EEF2FB"/>
-          </a:solidFill>
-          <a:ln>
-            <a:noFill/>
-          </a:ln>
-          <a:effectLst/>
-        </p:spPr>
-        <p:style>
-          <a:lnRef idx="1">
-            <a:schemeClr val="accent1"/>
-          </a:lnRef>
-          <a:fillRef idx="3">
-            <a:schemeClr val="accent1"/>
-          </a:fillRef>
-          <a:effectRef idx="2">
-            <a:schemeClr val="accent1"/>
-          </a:effectRef>
-          <a:fontRef idx="minor">
-            <a:schemeClr val="lt1"/>
-          </a:fontRef>
-        </p:style>
-        <p:txBody>
-          <a:bodyPr wrap="square" lIns="164592" tIns="73152" bIns="36576" rtlCol="0" anchor="ctr"/>
-          <a:lstStyle/>
-          <a:p>
-            <a:pPr algn="l"/>
-            <a:r>
-              <a:rPr sz="1400" b="1">
-                <a:solidFill>
-                  <a:srgbClr val="1F4E9C"/>
-                </a:solidFill>
-                <a:latin typeface="Segoe UI"/>
-              </a:rPr>
-              <a:t>Stagnation in the genetic search</a:t>
-            </a:r>
-          </a:p>
-          <a:p>
-            <a:pPr algn="l">
-              <a:spcBef>
-                <a:spcPts val="100"/>
-              </a:spcBef>
-            </a:pPr>
-            <a:r>
-              <a:rPr sz="1100">
-                <a:solidFill>
-                  <a:srgbClr val="141828"/>
-                </a:solidFill>
-                <a:latin typeface="Segoe UI"/>
-              </a:rPr>
-              <a:t>With a fixed low mutation rate the population collapsed onto one layout. Ramping the rate 0.06 to 0.12 across generations restored exploration without losing elitism's protection.</a:t>
-            </a:r>
-          </a:p>
-          <a:p>
-            <a:pPr algn="l">
-              <a:spcBef>
-                <a:spcPts val="100"/>
-              </a:spcBef>
-            </a:pPr>
-            <a:r>
-              <a:rPr sz="1050" b="1">
-                <a:solidFill>
-                  <a:srgbClr val="0F7D8C"/>
-                </a:solidFill>
-                <a:latin typeface="Segoe UI"/>
-              </a:rPr>
-              <a:t>→  Exploit early, explore late</a:t>
-            </a:r>
-          </a:p>
-        </p:txBody>
-      </p:sp>
-      <p:sp>
-        <p:nvSpPr>
-          <p:cNvPr id="9" name="Rounded Rectangle 8"/>
-          <p:cNvSpPr/>
-          <p:nvPr/>
-        </p:nvSpPr>
-        <p:spPr>
-          <a:xfrm>
-            <a:off x="777240" y="4315968"/>
-            <a:ext cx="10835640" cy="822960"/>
-          </a:xfrm>
-          <a:prstGeom prst="roundRect">
-            <a:avLst>
-              <a:gd name="adj" fmla="val 10000"/>
-            </a:avLst>
-          </a:prstGeom>
-          <a:solidFill>
-            <a:srgbClr val="E8F4F4"/>
-          </a:solidFill>
-          <a:ln>
-            <a:noFill/>
-          </a:ln>
-          <a:effectLst/>
-        </p:spPr>
-        <p:style>
-          <a:lnRef idx="1">
-            <a:schemeClr val="accent1"/>
-          </a:lnRef>
-          <a:fillRef idx="3">
-            <a:schemeClr val="accent1"/>
-          </a:fillRef>
-          <a:effectRef idx="2">
-            <a:schemeClr val="accent1"/>
-          </a:effectRef>
-          <a:fontRef idx="minor">
-            <a:schemeClr val="lt1"/>
-          </a:fontRef>
-        </p:style>
-        <p:txBody>
-          <a:bodyPr wrap="square" lIns="164592" tIns="73152" bIns="36576" rtlCol="0" anchor="ctr"/>
-          <a:lstStyle/>
-          <a:p>
-            <a:pPr algn="l"/>
-            <a:r>
-              <a:rPr sz="1400" b="1">
-                <a:solidFill>
-                  <a:srgbClr val="1F4E9C"/>
-                </a:solidFill>
-                <a:latin typeface="Segoe UI"/>
-              </a:rPr>
-              <a:t>Personalisation that does nothing</a:t>
-            </a:r>
-          </a:p>
-          <a:p>
-            <a:pPr algn="l">
-              <a:spcBef>
-                <a:spcPts val="100"/>
-              </a:spcBef>
-            </a:pPr>
-            <a:r>
-              <a:rPr sz="1100">
-                <a:solidFill>
-                  <a:srgbClr val="141828"/>
-                </a:solidFill>
-                <a:latin typeface="Segoe UI"/>
-              </a:rPr>
-              <a:t>The first attempt produced identical open ratios for every player level because the random seed dominated the outcome. Only averaging over 20 runs per band revealed the real 21% difference.</a:t>
-            </a:r>
-          </a:p>
-          <a:p>
-            <a:pPr algn="l">
-              <a:spcBef>
-                <a:spcPts val="100"/>
-              </a:spcBef>
-            </a:pPr>
-            <a:r>
-              <a:rPr sz="1050" b="1">
-                <a:solidFill>
-                  <a:srgbClr val="0F7D8C"/>
-                </a:solidFill>
-                <a:latin typeface="Segoe UI"/>
-              </a:rPr>
-              <a:t>→  Measure distributions, not single samples</a:t>
-            </a:r>
-          </a:p>
-        </p:txBody>
-      </p:sp>
-      <p:sp>
-        <p:nvSpPr>
-          <p:cNvPr id="10" name="Rounded Rectangle 9"/>
-          <p:cNvSpPr/>
-          <p:nvPr/>
-        </p:nvSpPr>
-        <p:spPr>
-          <a:xfrm>
-            <a:off x="777240" y="5221224"/>
-            <a:ext cx="10835640" cy="822960"/>
-          </a:xfrm>
-          <a:prstGeom prst="roundRect">
-            <a:avLst>
-              <a:gd name="adj" fmla="val 10000"/>
-            </a:avLst>
-          </a:prstGeom>
-          <a:solidFill>
-            <a:srgbClr val="EEF2FB"/>
-          </a:solidFill>
-          <a:ln>
-            <a:noFill/>
-          </a:ln>
-          <a:effectLst/>
-        </p:spPr>
-        <p:style>
-          <a:lnRef idx="1">
-            <a:schemeClr val="accent1"/>
-          </a:lnRef>
-          <a:fillRef idx="3">
-            <a:schemeClr val="accent1"/>
-          </a:fillRef>
-          <a:effectRef idx="2">
-            <a:schemeClr val="accent1"/>
-          </a:effectRef>
-          <a:fontRef idx="minor">
-            <a:schemeClr val="lt1"/>
-          </a:fontRef>
-        </p:style>
-        <p:txBody>
-          <a:bodyPr wrap="square" lIns="164592" tIns="73152" bIns="36576" rtlCol="0" anchor="ctr"/>
-          <a:lstStyle/>
-          <a:p>
-            <a:pPr algn="l"/>
-            <a:r>
-              <a:rPr sz="1400" b="1">
-                <a:solidFill>
-                  <a:srgbClr val="1F4E9C"/>
-                </a:solidFill>
-                <a:latin typeface="Segoe UI"/>
-              </a:rPr>
-              <a:t>Death that felt unfair</a:t>
-            </a:r>
-          </a:p>
-          <a:p>
-            <a:pPr algn="l">
-              <a:spcBef>
-                <a:spcPts val="100"/>
-              </a:spcBef>
-            </a:pPr>
-            <a:r>
-              <a:rPr sz="1100">
-                <a:solidFill>
-                  <a:srgbClr val="141828"/>
-                </a:solidFill>
-                <a:latin typeface="Segoe UI"/>
-              </a:rPr>
-              <a:t>The first run rollback restored some fields but not others, so players lost items they had earned. Deep-copying the full baseline and re-applying only coins and statistics fixed it.</a:t>
-            </a:r>
-          </a:p>
-          <a:p>
-            <a:pPr algn="l">
-              <a:spcBef>
-                <a:spcPts val="100"/>
-              </a:spcBef>
-            </a:pPr>
-            <a:r>
-              <a:rPr sz="1050" b="1">
-                <a:solidFill>
-                  <a:srgbClr val="0F7D8C"/>
-                </a:solidFill>
-                <a:latin typeface="Segoe UI"/>
-              </a:rPr>
-              <a:t>→  Define the penalty precisely, then enforce it uniformly</a:t>
-            </a:r>
-          </a:p>
-        </p:txBody>
-      </p:sp>
-    </p:spTree>
-  </p:cSld>
-  <p:clrMapOvr>
-    <a:masterClrMapping/>
-  </p:clrMapOvr>
-</p:sld>
-</file>
-
-<file path=ppt/slides/slide18.xml><?xml version="1.0" encoding="utf-8"?>
-<p:sld xmlns:a="http://schemas.openxmlformats.org/drawingml/2006/main" xmlns:r="http://schemas.openxmlformats.org/officeDocument/2006/relationships" xmlns:p="http://schemas.openxmlformats.org/presentationml/2006/main">
-  <p:cSld>
-    <p:bg>
-      <p:bgPr>
-        <a:solidFill>
-          <a:srgbClr val="FFFFFF"/>
-        </a:solidFill>
-        <a:effectLst/>
-      </p:bgPr>
-    </p:bg>
-    <p:spTree>
-      <p:nvGrpSpPr>
-        <p:cNvPr id="1" name=""/>
-        <p:cNvGrpSpPr/>
-        <p:nvPr/>
-      </p:nvGrpSpPr>
-      <p:grpSpPr>
-        <a:xfrm>
-          <a:off x="0" y="0"/>
-          <a:ext cx="0" cy="0"/>
-          <a:chOff x="0" y="0"/>
-          <a:chExt cx="0" cy="0"/>
-        </a:xfrm>
-      </p:grpSpPr>
-      <p:sp>
-        <p:nvSpPr>
-          <p:cNvPr id="2" name="Rectangle 1"/>
-          <p:cNvSpPr/>
-          <p:nvPr/>
-        </p:nvSpPr>
-        <p:spPr>
-          <a:xfrm>
-            <a:off x="502920" y="384048"/>
-            <a:ext cx="91440" cy="566928"/>
-          </a:xfrm>
-          <a:prstGeom prst="rect">
-            <a:avLst/>
-          </a:prstGeom>
-          <a:solidFill>
-            <a:srgbClr val="1F4E9C"/>
-          </a:solidFill>
-          <a:ln>
-            <a:noFill/>
-          </a:ln>
-          <a:effectLst/>
-        </p:spPr>
-        <p:style>
-          <a:lnRef idx="1">
-            <a:schemeClr val="accent1"/>
-          </a:lnRef>
-          <a:fillRef idx="3">
-            <a:schemeClr val="accent1"/>
-          </a:fillRef>
-          <a:effectRef idx="2">
-            <a:schemeClr val="accent1"/>
-          </a:effectRef>
-          <a:fontRef idx="minor">
-            <a:schemeClr val="lt1"/>
-          </a:fontRef>
-        </p:style>
-        <p:txBody>
-          <a:bodyPr rtlCol="0" anchor="ctr"/>
-          <a:lstStyle/>
-          <a:p>
-            <a:pPr algn="ctr"/>
-            <a:endParaRPr/>
-          </a:p>
-        </p:txBody>
-      </p:sp>
-      <p:sp>
-        <p:nvSpPr>
-          <p:cNvPr id="3" name="TextBox 2"/>
-          <p:cNvSpPr txBox="1"/>
-          <p:nvPr/>
-        </p:nvSpPr>
-        <p:spPr>
-          <a:xfrm>
-            <a:off x="749808" y="310896"/>
-            <a:ext cx="10881360" cy="713232"/>
-          </a:xfrm>
-          <a:prstGeom prst="rect">
-            <a:avLst/>
-          </a:prstGeom>
-          <a:noFill/>
-        </p:spPr>
-        <p:txBody>
-          <a:bodyPr wrap="square" lIns="0" tIns="0" rIns="0" bIns="0">
-            <a:spAutoFit/>
-          </a:bodyPr>
-          <a:lstStyle/>
-          <a:p>
-            <a:r>
-              <a:rPr sz="2800" b="1">
-                <a:solidFill>
-                  <a:srgbClr val="141828"/>
-                </a:solidFill>
-                <a:latin typeface="Segoe UI"/>
-              </a:rPr>
               <a:t>Conclusion</a:t>
             </a:r>
           </a:p>
@@ -11530,7 +9306,7 @@
 </p:sld>
 </file>
 
-<file path=ppt/slides/slide19.xml><?xml version="1.0" encoding="utf-8"?>
+<file path=ppt/slides/slide17.xml><?xml version="1.0" encoding="utf-8"?>
 <p:sld xmlns:a="http://schemas.openxmlformats.org/drawingml/2006/main" xmlns:r="http://schemas.openxmlformats.org/officeDocument/2006/relationships" xmlns:p="http://schemas.openxmlformats.org/presentationml/2006/main">
   <p:cSld>
     <p:bg>
